--- a/About_Courses/Importance_Of_Programming.pptx
+++ b/About_Courses/Importance_Of_Programming.pptx
@@ -1,47 +1,948 @@
 
 <file path=ppt/presentation.xml><?xml version="1.0" encoding="utf-8"?>
-<p:presentation xmlns:a="http://schemas.openxmlformats.org/drawingml/2006/main" xmlns:r="http://schemas.openxmlformats.org/officeDocument/2006/relationships" xmlns:p="http://schemas.openxmlformats.org/presentationml/2006/main">
+<p:presentation xmlns:a="http://schemas.openxmlformats.org/drawingml/2006/main" xmlns:r="http://schemas.openxmlformats.org/officeDocument/2006/relationships" xmlns:p="http://schemas.openxmlformats.org/presentationml/2006/main" xmlns:m="http://schemas.openxmlformats.org/officeDocument/2006/math" xmlns:w="http://schemas.openxmlformats.org/wordprocessingml/2006/main">
   <p:sldMasterIdLst>
     <p:sldMasterId id="2147483648" r:id="rId1"/>
   </p:sldMasterIdLst>
+  <p:notesMasterIdLst>
+    <p:notesMasterId r:id="rId11"/>
+  </p:notesMasterIdLst>
   <p:sldIdLst>
-    <p:sldId id="311" r:id="rId2"/>
-    <p:sldId id="257" r:id="rId3"/>
-    <p:sldId id="333" r:id="rId4"/>
-    <p:sldId id="334" r:id="rId5"/>
-    <p:sldId id="335" r:id="rId6"/>
-    <p:sldId id="336" r:id="rId7"/>
-    <p:sldId id="337" r:id="rId8"/>
-    <p:sldId id="313" r:id="rId9"/>
+    <p:sldId id="256" r:id="rId4"/>
+    <p:sldId id="257" r:id="rId5"/>
+    <p:sldId id="258" r:id="rId6"/>
+    <p:sldId id="259" r:id="rId7"/>
+    <p:sldId id="260" r:id="rId8"/>
+    <p:sldId id="261" r:id="rId9"/>
+    <p:sldId id="262" r:id="rId10"/>
   </p:sldIdLst>
   <p:sldSz cx="13411200" cy="10058400"/>
   <p:notesSz cx="7772400" cy="10058400"/>
   <p:defaultTextStyle>
     <a:defPPr>
-      <a:defRPr kern="0"/>
+      <a:defRPr/>
     </a:defPPr>
   </p:defaultTextStyle>
-  <p:extLst>
-    <p:ext uri="{EFAFB233-063F-42B5-8137-9DF3F51BA10A}">
-      <p15:sldGuideLst xmlns:p15="http://schemas.microsoft.com/office/powerpoint/2012/main">
-        <p15:guide id="1" orient="horz" pos="2880" userDrawn="1">
-          <p15:clr>
-            <a:srgbClr val="A4A3A4"/>
-          </p15:clr>
-        </p15:guide>
-        <p15:guide id="2" pos="3727" userDrawn="1">
-          <p15:clr>
-            <a:srgbClr val="A4A3A4"/>
-          </p15:clr>
-        </p15:guide>
-      </p15:sldGuideLst>
-    </p:ext>
-  </p:extLst>
 </p:presentation>
 </file>
 
+<file path=ppt/notesMasters/notesMaster1.xml><?xml version="1.0" encoding="utf-8"?>
+<p:notesMaster xmlns:a="http://schemas.openxmlformats.org/drawingml/2006/main" xmlns:r="http://schemas.openxmlformats.org/officeDocument/2006/relationships" xmlns:p="http://schemas.openxmlformats.org/presentationml/2006/main">
+  <p:cSld name="">
+    <p:bg>
+      <p:bgRef idx="1001">
+        <a:schemeClr val="bg1"/>
+      </p:bgRef>
+    </p:bg>
+    <p:spTree>
+      <p:nvGrpSpPr>
+        <p:cNvPr id="1" name=""/>
+        <p:cNvGrpSpPr/>
+        <p:nvPr/>
+      </p:nvGrpSpPr>
+      <p:grpSpPr bwMode="auto">
+        <a:xfrm>
+          <a:off x="0" y="0"/>
+          <a:ext cx="0" cy="0"/>
+          <a:chOff x="0" y="0"/>
+          <a:chExt cx="0" cy="0"/>
+        </a:xfrm>
+      </p:grpSpPr>
+      <p:sp>
+        <p:nvSpPr>
+          <p:cNvPr id="2" name="Header Placeholder 1"/>
+          <p:cNvSpPr>
+            <a:spLocks noGrp="1"/>
+          </p:cNvSpPr>
+          <p:nvPr>
+            <p:ph type="hdr" sz="quarter"/>
+          </p:nvPr>
+        </p:nvSpPr>
+        <p:spPr bwMode="auto">
+          <a:xfrm>
+            <a:off x="0" y="0"/>
+            <a:ext cx="2971800" cy="458788"/>
+          </a:xfrm>
+          <a:prstGeom prst="rect">
+            <a:avLst/>
+          </a:prstGeom>
+        </p:spPr>
+        <p:txBody>
+          <a:bodyPr vert="horz" lIns="91440" tIns="45720" rIns="91440" bIns="45720" rtlCol="0" anchor="ctr"/>
+          <a:lstStyle>
+            <a:lvl1pPr algn="l">
+              <a:defRPr sz="1200"/>
+            </a:lvl1pPr>
+          </a:lstStyle>
+          <a:p>
+            <a:pPr>
+              <a:defRPr/>
+            </a:pPr>
+            <a:endParaRPr/>
+          </a:p>
+        </p:txBody>
+      </p:sp>
+      <p:sp>
+        <p:nvSpPr>
+          <p:cNvPr id="3" name="Date Placeholder 2"/>
+          <p:cNvSpPr>
+            <a:spLocks noGrp="1"/>
+          </p:cNvSpPr>
+          <p:nvPr>
+            <p:ph type="dt" idx="2"/>
+          </p:nvPr>
+        </p:nvSpPr>
+        <p:spPr bwMode="auto">
+          <a:xfrm>
+            <a:off x="3884613" y="0"/>
+            <a:ext cx="2971800" cy="458788"/>
+          </a:xfrm>
+          <a:prstGeom prst="rect">
+            <a:avLst/>
+          </a:prstGeom>
+        </p:spPr>
+        <p:txBody>
+          <a:bodyPr vert="horz" lIns="91440" tIns="45720" rIns="91440" bIns="45720" rtlCol="0" anchor="ctr"/>
+          <a:lstStyle>
+            <a:lvl1pPr algn="r">
+              <a:defRPr sz="1200"/>
+            </a:lvl1pPr>
+          </a:lstStyle>
+          <a:p>
+            <a:pPr>
+              <a:defRPr/>
+            </a:pPr>
+            <a:endParaRPr/>
+          </a:p>
+        </p:txBody>
+      </p:sp>
+      <p:sp>
+        <p:nvSpPr>
+          <p:cNvPr id="3" name="Date Placeholder 2"/>
+          <p:cNvSpPr>
+            <a:spLocks noGrp="1"/>
+          </p:cNvSpPr>
+          <p:nvPr>
+            <p:ph type="dt" idx="3"/>
+          </p:nvPr>
+        </p:nvSpPr>
+        <p:spPr bwMode="auto">
+          <a:xfrm>
+            <a:off x="3884613" y="0"/>
+            <a:ext cx="2971800" cy="458788"/>
+          </a:xfrm>
+          <a:prstGeom prst="rect">
+            <a:avLst/>
+          </a:prstGeom>
+        </p:spPr>
+        <p:txBody>
+          <a:bodyPr vert="horz" lIns="91440" tIns="45720" rIns="91440" bIns="45720" rtlCol="0" anchor="ctr"/>
+          <a:lstStyle>
+            <a:lvl1pPr algn="r">
+              <a:defRPr sz="1200"/>
+            </a:lvl1pPr>
+          </a:lstStyle>
+          <a:p>
+            <a:pPr>
+              <a:defRPr/>
+            </a:pPr>
+            <a:endParaRPr/>
+          </a:p>
+        </p:txBody>
+      </p:sp>
+      <p:sp>
+        <p:nvSpPr>
+          <p:cNvPr id="5" name="Notes Placeholder 4"/>
+          <p:cNvSpPr>
+            <a:spLocks noGrp="1"/>
+          </p:cNvSpPr>
+          <p:nvPr>
+            <p:ph type="body" sz="quarter" idx="1"/>
+          </p:nvPr>
+        </p:nvSpPr>
+        <p:spPr bwMode="auto">
+          <a:xfrm>
+            <a:off x="685800" y="4400550"/>
+            <a:ext cx="5486400" cy="3600450"/>
+          </a:xfrm>
+          <a:prstGeom prst="rect">
+            <a:avLst/>
+          </a:prstGeom>
+        </p:spPr>
+        <p:txBody>
+          <a:bodyPr vert="horz" lIns="91440" tIns="45720" rIns="91440" bIns="45720" rtlCol="0" anchor="ctr"/>
+          <a:lstStyle/>
+          <a:p>
+            <a:pPr>
+              <a:defRPr/>
+            </a:pPr>
+            <a:endParaRPr/>
+          </a:p>
+        </p:txBody>
+      </p:sp>
+      <p:sp>
+        <p:nvSpPr>
+          <p:cNvPr id="6" name="Footer Placeholder 5"/>
+          <p:cNvSpPr>
+            <a:spLocks noGrp="1"/>
+          </p:cNvSpPr>
+          <p:nvPr>
+            <p:ph type="ftr" sz="quarter" idx="4"/>
+          </p:nvPr>
+        </p:nvSpPr>
+        <p:spPr bwMode="auto">
+          <a:xfrm>
+            <a:off x="0" y="8685213"/>
+            <a:ext cx="2971800" cy="458787"/>
+          </a:xfrm>
+          <a:prstGeom prst="rect">
+            <a:avLst/>
+          </a:prstGeom>
+        </p:spPr>
+        <p:txBody>
+          <a:bodyPr vert="horz" lIns="91440" tIns="45720" rIns="91440" bIns="45720" rtlCol="0" anchor="b"/>
+          <a:lstStyle>
+            <a:lvl1pPr algn="l">
+              <a:defRPr sz="1200"/>
+            </a:lvl1pPr>
+          </a:lstStyle>
+          <a:p>
+            <a:pPr>
+              <a:defRPr/>
+            </a:pPr>
+            <a:endParaRPr/>
+          </a:p>
+        </p:txBody>
+      </p:sp>
+      <p:sp>
+        <p:nvSpPr>
+          <p:cNvPr id="7" name="Slide Number Placeholder 6"/>
+          <p:cNvSpPr>
+            <a:spLocks noGrp="1"/>
+          </p:cNvSpPr>
+          <p:nvPr>
+            <p:ph type="sldNum" sz="quarter" idx="10"/>
+          </p:nvPr>
+        </p:nvSpPr>
+        <p:spPr bwMode="auto">
+          <a:xfrm>
+            <a:off x="3884613" y="8685213"/>
+            <a:ext cx="2971800" cy="458787"/>
+          </a:xfrm>
+          <a:prstGeom prst="rect">
+            <a:avLst/>
+          </a:prstGeom>
+        </p:spPr>
+        <p:txBody>
+          <a:bodyPr vert="horz" lIns="91440" tIns="45720" rIns="91440" bIns="45720" rtlCol="0" anchor="b"/>
+          <a:lstStyle>
+            <a:lvl1pPr algn="r">
+              <a:defRPr sz="1200"/>
+            </a:lvl1pPr>
+          </a:lstStyle>
+          <a:p>
+            <a:pPr>
+              <a:defRPr/>
+            </a:pPr>
+            <a:endParaRPr/>
+          </a:p>
+        </p:txBody>
+      </p:sp>
+    </p:spTree>
+  </p:cSld>
+  <p:clrMap bg1="lt1" tx1="dk1" bg2="lt2" tx2="dk2" accent1="accent1" accent2="accent2" accent3="accent3" accent4="accent4" accent5="accent5" accent6="accent6" hlink="hlink" folHlink="folHlink"/>
+  <p:notesStyle>
+    <a:lvl1pPr marL="0" algn="l" defTabSz="914400">
+      <a:defRPr sz="1200">
+        <a:solidFill>
+          <a:schemeClr val="tx1"/>
+        </a:solidFill>
+        <a:latin typeface="+mn-lt"/>
+        <a:ea typeface="+mn-ea"/>
+        <a:cs typeface="+mn-cs"/>
+      </a:defRPr>
+    </a:lvl1pPr>
+    <a:lvl2pPr marL="457200" algn="l" defTabSz="914400">
+      <a:defRPr sz="1200">
+        <a:solidFill>
+          <a:schemeClr val="tx1"/>
+        </a:solidFill>
+        <a:latin typeface="+mn-lt"/>
+        <a:ea typeface="+mn-ea"/>
+        <a:cs typeface="+mn-cs"/>
+      </a:defRPr>
+    </a:lvl2pPr>
+    <a:lvl3pPr marL="914400" algn="l" defTabSz="914400">
+      <a:defRPr sz="1200">
+        <a:solidFill>
+          <a:schemeClr val="tx1"/>
+        </a:solidFill>
+        <a:latin typeface="+mn-lt"/>
+        <a:ea typeface="+mn-ea"/>
+        <a:cs typeface="+mn-cs"/>
+      </a:defRPr>
+    </a:lvl3pPr>
+    <a:lvl4pPr marL="1371600" algn="l" defTabSz="914400">
+      <a:defRPr sz="1200">
+        <a:solidFill>
+          <a:schemeClr val="tx1"/>
+        </a:solidFill>
+        <a:latin typeface="+mn-lt"/>
+        <a:ea typeface="+mn-ea"/>
+        <a:cs typeface="+mn-cs"/>
+      </a:defRPr>
+    </a:lvl4pPr>
+    <a:lvl5pPr marL="1828800" algn="l" defTabSz="914400">
+      <a:defRPr sz="1200">
+        <a:solidFill>
+          <a:schemeClr val="tx1"/>
+        </a:solidFill>
+        <a:latin typeface="+mn-lt"/>
+        <a:ea typeface="+mn-ea"/>
+        <a:cs typeface="+mn-cs"/>
+      </a:defRPr>
+    </a:lvl5pPr>
+    <a:lvl6pPr marL="2286000" algn="l" defTabSz="914400">
+      <a:defRPr sz="1200">
+        <a:solidFill>
+          <a:schemeClr val="tx1"/>
+        </a:solidFill>
+        <a:latin typeface="+mn-lt"/>
+        <a:ea typeface="+mn-ea"/>
+        <a:cs typeface="+mn-cs"/>
+      </a:defRPr>
+    </a:lvl6pPr>
+    <a:lvl7pPr marL="2743200" algn="l" defTabSz="914400">
+      <a:defRPr sz="1200">
+        <a:solidFill>
+          <a:schemeClr val="tx1"/>
+        </a:solidFill>
+        <a:latin typeface="+mn-lt"/>
+        <a:ea typeface="+mn-ea"/>
+        <a:cs typeface="+mn-cs"/>
+      </a:defRPr>
+    </a:lvl7pPr>
+    <a:lvl8pPr marL="3200400" algn="l" defTabSz="914400">
+      <a:defRPr sz="1200">
+        <a:solidFill>
+          <a:schemeClr val="tx1"/>
+        </a:solidFill>
+        <a:latin typeface="+mn-lt"/>
+        <a:ea typeface="+mn-ea"/>
+        <a:cs typeface="+mn-cs"/>
+      </a:defRPr>
+    </a:lvl8pPr>
+    <a:lvl9pPr marL="3657600" algn="l" defTabSz="914400">
+      <a:defRPr sz="1200">
+        <a:solidFill>
+          <a:schemeClr val="tx1"/>
+        </a:solidFill>
+        <a:latin typeface="+mn-lt"/>
+        <a:ea typeface="+mn-ea"/>
+        <a:cs typeface="+mn-cs"/>
+      </a:defRPr>
+    </a:lvl9pPr>
+  </p:notesStyle>
+</p:notesMaster>
+</file>
+
+<file path=ppt/notesSlides/notesSlide1.xml><?xml version="1.0" encoding="utf-8"?>
+<p:notes xmlns:a="http://schemas.openxmlformats.org/drawingml/2006/main" xmlns:r="http://schemas.openxmlformats.org/officeDocument/2006/relationships" xmlns:p="http://schemas.openxmlformats.org/presentationml/2006/main" xmlns:m="http://schemas.openxmlformats.org/officeDocument/2006/math" xmlns:w="http://schemas.openxmlformats.org/wordprocessingml/2006/main">
+  <p:cSld name="">
+    <p:spTree>
+      <p:nvGrpSpPr>
+        <p:cNvPr id="1" name=""/>
+        <p:cNvGrpSpPr/>
+        <p:nvPr/>
+      </p:nvGrpSpPr>
+      <p:grpSpPr bwMode="auto">
+        <a:xfrm>
+          <a:off x="0" y="0"/>
+          <a:ext cx="0" cy="0"/>
+          <a:chOff x="0" y="0"/>
+          <a:chExt cx="0" cy="0"/>
+        </a:xfrm>
+      </p:grpSpPr>
+      <p:sp>
+        <p:nvSpPr>
+          <p:cNvPr id="2" name="Slide Image Placeholder 1"/>
+          <p:cNvSpPr>
+            <a:spLocks noChangeAspect="1" noGrp="1" noRot="1"/>
+          </p:cNvSpPr>
+          <p:nvPr>
+            <p:ph type="sldImg"/>
+          </p:nvPr>
+        </p:nvSpPr>
+        <p:spPr bwMode="auto"/>
+      </p:sp>
+      <p:sp>
+        <p:nvSpPr>
+          <p:cNvPr id="3" name="Notes Placeholder 2"/>
+          <p:cNvSpPr>
+            <a:spLocks noGrp="1"/>
+          </p:cNvSpPr>
+          <p:nvPr>
+            <p:ph type="body" idx="1"/>
+          </p:nvPr>
+        </p:nvSpPr>
+        <p:spPr bwMode="auto"/>
+        <p:txBody>
+          <a:bodyPr/>
+          <a:lstStyle/>
+          <a:p>
+            <a:pPr>
+              <a:defRPr/>
+            </a:pPr>
+            <a:endParaRPr/>
+          </a:p>
+        </p:txBody>
+      </p:sp>
+      <p:sp>
+        <p:nvSpPr>
+          <p:cNvPr id="4" name="Slide Number Placeholder 3"/>
+          <p:cNvSpPr>
+            <a:spLocks noGrp="1"/>
+          </p:cNvSpPr>
+          <p:nvPr>
+            <p:ph type="sldNum" sz="quarter" idx="10"/>
+          </p:nvPr>
+        </p:nvSpPr>
+        <p:spPr bwMode="auto"/>
+        <p:txBody>
+          <a:bodyPr/>
+          <a:lstStyle/>
+          <a:p>
+            <a:pPr>
+              <a:defRPr/>
+            </a:pPr>
+            <a:fld id="{4EE38577-2701-D5E6-47FD-0B3B6D7F62A1}" type="slidenum">
+              <a:rPr/>
+              <a:t/>
+            </a:fld>
+            <a:endParaRPr/>
+          </a:p>
+        </p:txBody>
+      </p:sp>
+    </p:spTree>
+  </p:cSld>
+  <p:clrMapOvr>
+    <a:masterClrMapping/>
+  </p:clrMapOvr>
+</p:notes>
+</file>
+
+<file path=ppt/notesSlides/notesSlide2.xml><?xml version="1.0" encoding="utf-8"?>
+<p:notes xmlns:a="http://schemas.openxmlformats.org/drawingml/2006/main" xmlns:r="http://schemas.openxmlformats.org/officeDocument/2006/relationships" xmlns:p="http://schemas.openxmlformats.org/presentationml/2006/main" xmlns:m="http://schemas.openxmlformats.org/officeDocument/2006/math" xmlns:w="http://schemas.openxmlformats.org/wordprocessingml/2006/main">
+  <p:cSld name="">
+    <p:spTree>
+      <p:nvGrpSpPr>
+        <p:cNvPr id="1" name=""/>
+        <p:cNvGrpSpPr/>
+        <p:nvPr/>
+      </p:nvGrpSpPr>
+      <p:grpSpPr bwMode="auto">
+        <a:xfrm>
+          <a:off x="0" y="0"/>
+          <a:ext cx="0" cy="0"/>
+          <a:chOff x="0" y="0"/>
+          <a:chExt cx="0" cy="0"/>
+        </a:xfrm>
+      </p:grpSpPr>
+      <p:sp>
+        <p:nvSpPr>
+          <p:cNvPr id="2" name="Slide Image Placeholder 1"/>
+          <p:cNvSpPr>
+            <a:spLocks noChangeAspect="1" noGrp="1" noRot="1"/>
+          </p:cNvSpPr>
+          <p:nvPr>
+            <p:ph type="sldImg"/>
+          </p:nvPr>
+        </p:nvSpPr>
+        <p:spPr bwMode="auto"/>
+      </p:sp>
+      <p:sp>
+        <p:nvSpPr>
+          <p:cNvPr id="3" name="Notes Placeholder 2"/>
+          <p:cNvSpPr>
+            <a:spLocks noGrp="1"/>
+          </p:cNvSpPr>
+          <p:nvPr>
+            <p:ph type="body" idx="1"/>
+          </p:nvPr>
+        </p:nvSpPr>
+        <p:spPr bwMode="auto"/>
+        <p:txBody>
+          <a:bodyPr/>
+          <a:lstStyle/>
+          <a:p>
+            <a:pPr>
+              <a:defRPr/>
+            </a:pPr>
+            <a:endParaRPr/>
+          </a:p>
+        </p:txBody>
+      </p:sp>
+      <p:sp>
+        <p:nvSpPr>
+          <p:cNvPr id="4" name="Slide Number Placeholder 3"/>
+          <p:cNvSpPr>
+            <a:spLocks noGrp="1"/>
+          </p:cNvSpPr>
+          <p:nvPr>
+            <p:ph type="sldNum" sz="quarter" idx="10"/>
+          </p:nvPr>
+        </p:nvSpPr>
+        <p:spPr bwMode="auto"/>
+        <p:txBody>
+          <a:bodyPr/>
+          <a:lstStyle/>
+          <a:p>
+            <a:pPr>
+              <a:defRPr/>
+            </a:pPr>
+            <a:fld id="{94CF564D-E930-5FAE-E299-36EAE291F173}" type="slidenum">
+              <a:rPr/>
+              <a:t/>
+            </a:fld>
+            <a:endParaRPr/>
+          </a:p>
+        </p:txBody>
+      </p:sp>
+    </p:spTree>
+  </p:cSld>
+  <p:clrMapOvr>
+    <a:masterClrMapping/>
+  </p:clrMapOvr>
+</p:notes>
+</file>
+
+<file path=ppt/notesSlides/notesSlide3.xml><?xml version="1.0" encoding="utf-8"?>
+<p:notes xmlns:a="http://schemas.openxmlformats.org/drawingml/2006/main" xmlns:r="http://schemas.openxmlformats.org/officeDocument/2006/relationships" xmlns:p="http://schemas.openxmlformats.org/presentationml/2006/main" xmlns:m="http://schemas.openxmlformats.org/officeDocument/2006/math" xmlns:w="http://schemas.openxmlformats.org/wordprocessingml/2006/main">
+  <p:cSld name="">
+    <p:spTree>
+      <p:nvGrpSpPr>
+        <p:cNvPr id="1" name=""/>
+        <p:cNvGrpSpPr/>
+        <p:nvPr/>
+      </p:nvGrpSpPr>
+      <p:grpSpPr bwMode="auto">
+        <a:xfrm>
+          <a:off x="0" y="0"/>
+          <a:ext cx="0" cy="0"/>
+          <a:chOff x="0" y="0"/>
+          <a:chExt cx="0" cy="0"/>
+        </a:xfrm>
+      </p:grpSpPr>
+      <p:sp>
+        <p:nvSpPr>
+          <p:cNvPr id="2" name="Slide Image Placeholder 1"/>
+          <p:cNvSpPr>
+            <a:spLocks noChangeAspect="1" noGrp="1" noRot="1"/>
+          </p:cNvSpPr>
+          <p:nvPr>
+            <p:ph type="sldImg"/>
+          </p:nvPr>
+        </p:nvSpPr>
+        <p:spPr bwMode="auto"/>
+      </p:sp>
+      <p:sp>
+        <p:nvSpPr>
+          <p:cNvPr id="3" name="Notes Placeholder 2"/>
+          <p:cNvSpPr>
+            <a:spLocks noGrp="1"/>
+          </p:cNvSpPr>
+          <p:nvPr>
+            <p:ph type="body" idx="1"/>
+          </p:nvPr>
+        </p:nvSpPr>
+        <p:spPr bwMode="auto"/>
+        <p:txBody>
+          <a:bodyPr/>
+          <a:lstStyle/>
+          <a:p>
+            <a:pPr>
+              <a:defRPr/>
+            </a:pPr>
+            <a:endParaRPr/>
+          </a:p>
+        </p:txBody>
+      </p:sp>
+      <p:sp>
+        <p:nvSpPr>
+          <p:cNvPr id="4" name="Slide Number Placeholder 3"/>
+          <p:cNvSpPr>
+            <a:spLocks noGrp="1"/>
+          </p:cNvSpPr>
+          <p:nvPr>
+            <p:ph type="sldNum" sz="quarter" idx="10"/>
+          </p:nvPr>
+        </p:nvSpPr>
+        <p:spPr bwMode="auto"/>
+        <p:txBody>
+          <a:bodyPr/>
+          <a:lstStyle/>
+          <a:p>
+            <a:pPr>
+              <a:defRPr/>
+            </a:pPr>
+            <a:fld id="{FFF99FD8-67A8-311F-05FA-D09AA336802B}" type="slidenum">
+              <a:rPr/>
+              <a:t/>
+            </a:fld>
+            <a:endParaRPr/>
+          </a:p>
+        </p:txBody>
+      </p:sp>
+    </p:spTree>
+  </p:cSld>
+  <p:clrMapOvr>
+    <a:masterClrMapping/>
+  </p:clrMapOvr>
+</p:notes>
+</file>
+
+<file path=ppt/notesSlides/notesSlide4.xml><?xml version="1.0" encoding="utf-8"?>
+<p:notes xmlns:a="http://schemas.openxmlformats.org/drawingml/2006/main" xmlns:r="http://schemas.openxmlformats.org/officeDocument/2006/relationships" xmlns:p="http://schemas.openxmlformats.org/presentationml/2006/main" xmlns:m="http://schemas.openxmlformats.org/officeDocument/2006/math" xmlns:w="http://schemas.openxmlformats.org/wordprocessingml/2006/main">
+  <p:cSld name="">
+    <p:spTree>
+      <p:nvGrpSpPr>
+        <p:cNvPr id="1" name=""/>
+        <p:cNvGrpSpPr/>
+        <p:nvPr/>
+      </p:nvGrpSpPr>
+      <p:grpSpPr bwMode="auto">
+        <a:xfrm>
+          <a:off x="0" y="0"/>
+          <a:ext cx="0" cy="0"/>
+          <a:chOff x="0" y="0"/>
+          <a:chExt cx="0" cy="0"/>
+        </a:xfrm>
+      </p:grpSpPr>
+      <p:sp>
+        <p:nvSpPr>
+          <p:cNvPr id="2" name="Slide Image Placeholder 1"/>
+          <p:cNvSpPr>
+            <a:spLocks noChangeAspect="1" noGrp="1" noRot="1"/>
+          </p:cNvSpPr>
+          <p:nvPr>
+            <p:ph type="sldImg"/>
+          </p:nvPr>
+        </p:nvSpPr>
+        <p:spPr bwMode="auto"/>
+      </p:sp>
+      <p:sp>
+        <p:nvSpPr>
+          <p:cNvPr id="3" name="Notes Placeholder 2"/>
+          <p:cNvSpPr>
+            <a:spLocks noGrp="1"/>
+          </p:cNvSpPr>
+          <p:nvPr>
+            <p:ph type="body" idx="1"/>
+          </p:nvPr>
+        </p:nvSpPr>
+        <p:spPr bwMode="auto"/>
+        <p:txBody>
+          <a:bodyPr/>
+          <a:lstStyle/>
+          <a:p>
+            <a:pPr>
+              <a:defRPr/>
+            </a:pPr>
+            <a:endParaRPr/>
+          </a:p>
+        </p:txBody>
+      </p:sp>
+      <p:sp>
+        <p:nvSpPr>
+          <p:cNvPr id="4" name="Slide Number Placeholder 3"/>
+          <p:cNvSpPr>
+            <a:spLocks noGrp="1"/>
+          </p:cNvSpPr>
+          <p:nvPr>
+            <p:ph type="sldNum" sz="quarter" idx="10"/>
+          </p:nvPr>
+        </p:nvSpPr>
+        <p:spPr bwMode="auto"/>
+        <p:txBody>
+          <a:bodyPr/>
+          <a:lstStyle/>
+          <a:p>
+            <a:pPr>
+              <a:defRPr/>
+            </a:pPr>
+            <a:fld id="{3B69E757-DEA1-7B22-A67E-54C1294E61B8}" type="slidenum">
+              <a:rPr/>
+              <a:t/>
+            </a:fld>
+            <a:endParaRPr/>
+          </a:p>
+        </p:txBody>
+      </p:sp>
+    </p:spTree>
+  </p:cSld>
+  <p:clrMapOvr>
+    <a:masterClrMapping/>
+  </p:clrMapOvr>
+</p:notes>
+</file>
+
+<file path=ppt/notesSlides/notesSlide5.xml><?xml version="1.0" encoding="utf-8"?>
+<p:notes xmlns:a="http://schemas.openxmlformats.org/drawingml/2006/main" xmlns:r="http://schemas.openxmlformats.org/officeDocument/2006/relationships" xmlns:p="http://schemas.openxmlformats.org/presentationml/2006/main" xmlns:m="http://schemas.openxmlformats.org/officeDocument/2006/math" xmlns:w="http://schemas.openxmlformats.org/wordprocessingml/2006/main">
+  <p:cSld name="">
+    <p:spTree>
+      <p:nvGrpSpPr>
+        <p:cNvPr id="1" name=""/>
+        <p:cNvGrpSpPr/>
+        <p:nvPr/>
+      </p:nvGrpSpPr>
+      <p:grpSpPr bwMode="auto">
+        <a:xfrm>
+          <a:off x="0" y="0"/>
+          <a:ext cx="0" cy="0"/>
+          <a:chOff x="0" y="0"/>
+          <a:chExt cx="0" cy="0"/>
+        </a:xfrm>
+      </p:grpSpPr>
+      <p:sp>
+        <p:nvSpPr>
+          <p:cNvPr id="2" name="Slide Image Placeholder 1"/>
+          <p:cNvSpPr>
+            <a:spLocks noChangeAspect="1" noGrp="1" noRot="1"/>
+          </p:cNvSpPr>
+          <p:nvPr>
+            <p:ph type="sldImg"/>
+          </p:nvPr>
+        </p:nvSpPr>
+        <p:spPr bwMode="auto"/>
+      </p:sp>
+      <p:sp>
+        <p:nvSpPr>
+          <p:cNvPr id="3" name="Notes Placeholder 2"/>
+          <p:cNvSpPr>
+            <a:spLocks noGrp="1"/>
+          </p:cNvSpPr>
+          <p:nvPr>
+            <p:ph type="body" idx="1"/>
+          </p:nvPr>
+        </p:nvSpPr>
+        <p:spPr bwMode="auto"/>
+        <p:txBody>
+          <a:bodyPr/>
+          <a:lstStyle/>
+          <a:p>
+            <a:pPr>
+              <a:defRPr/>
+            </a:pPr>
+            <a:endParaRPr/>
+          </a:p>
+        </p:txBody>
+      </p:sp>
+      <p:sp>
+        <p:nvSpPr>
+          <p:cNvPr id="4" name="Slide Number Placeholder 3"/>
+          <p:cNvSpPr>
+            <a:spLocks noGrp="1"/>
+          </p:cNvSpPr>
+          <p:nvPr>
+            <p:ph type="sldNum" sz="quarter" idx="10"/>
+          </p:nvPr>
+        </p:nvSpPr>
+        <p:spPr bwMode="auto"/>
+        <p:txBody>
+          <a:bodyPr/>
+          <a:lstStyle/>
+          <a:p>
+            <a:pPr>
+              <a:defRPr/>
+            </a:pPr>
+            <a:fld id="{E5108448-1104-DF28-9F35-46E7E7F068D7}" type="slidenum">
+              <a:rPr/>
+              <a:t/>
+            </a:fld>
+            <a:endParaRPr/>
+          </a:p>
+        </p:txBody>
+      </p:sp>
+    </p:spTree>
+  </p:cSld>
+  <p:clrMapOvr>
+    <a:masterClrMapping/>
+  </p:clrMapOvr>
+</p:notes>
+</file>
+
+<file path=ppt/notesSlides/notesSlide6.xml><?xml version="1.0" encoding="utf-8"?>
+<p:notes xmlns:a="http://schemas.openxmlformats.org/drawingml/2006/main" xmlns:r="http://schemas.openxmlformats.org/officeDocument/2006/relationships" xmlns:p="http://schemas.openxmlformats.org/presentationml/2006/main" xmlns:m="http://schemas.openxmlformats.org/officeDocument/2006/math" xmlns:w="http://schemas.openxmlformats.org/wordprocessingml/2006/main">
+  <p:cSld name="">
+    <p:spTree>
+      <p:nvGrpSpPr>
+        <p:cNvPr id="1" name=""/>
+        <p:cNvGrpSpPr/>
+        <p:nvPr/>
+      </p:nvGrpSpPr>
+      <p:grpSpPr bwMode="auto">
+        <a:xfrm>
+          <a:off x="0" y="0"/>
+          <a:ext cx="0" cy="0"/>
+          <a:chOff x="0" y="0"/>
+          <a:chExt cx="0" cy="0"/>
+        </a:xfrm>
+      </p:grpSpPr>
+      <p:sp>
+        <p:nvSpPr>
+          <p:cNvPr id="2" name="Slide Image Placeholder 1"/>
+          <p:cNvSpPr>
+            <a:spLocks noChangeAspect="1" noGrp="1" noRot="1"/>
+          </p:cNvSpPr>
+          <p:nvPr>
+            <p:ph type="sldImg"/>
+          </p:nvPr>
+        </p:nvSpPr>
+        <p:spPr bwMode="auto"/>
+      </p:sp>
+      <p:sp>
+        <p:nvSpPr>
+          <p:cNvPr id="3" name="Notes Placeholder 2"/>
+          <p:cNvSpPr>
+            <a:spLocks noGrp="1"/>
+          </p:cNvSpPr>
+          <p:nvPr>
+            <p:ph type="body" idx="1"/>
+          </p:nvPr>
+        </p:nvSpPr>
+        <p:spPr bwMode="auto"/>
+        <p:txBody>
+          <a:bodyPr/>
+          <a:lstStyle/>
+          <a:p>
+            <a:pPr>
+              <a:defRPr/>
+            </a:pPr>
+            <a:endParaRPr/>
+          </a:p>
+        </p:txBody>
+      </p:sp>
+      <p:sp>
+        <p:nvSpPr>
+          <p:cNvPr id="4" name="Slide Number Placeholder 3"/>
+          <p:cNvSpPr>
+            <a:spLocks noGrp="1"/>
+          </p:cNvSpPr>
+          <p:nvPr>
+            <p:ph type="sldNum" sz="quarter" idx="10"/>
+          </p:nvPr>
+        </p:nvSpPr>
+        <p:spPr bwMode="auto"/>
+        <p:txBody>
+          <a:bodyPr/>
+          <a:lstStyle/>
+          <a:p>
+            <a:pPr>
+              <a:defRPr/>
+            </a:pPr>
+            <a:fld id="{23F8553F-D194-502B-DAD3-59EC6D1E3352}" type="slidenum">
+              <a:rPr/>
+              <a:t/>
+            </a:fld>
+            <a:endParaRPr/>
+          </a:p>
+        </p:txBody>
+      </p:sp>
+    </p:spTree>
+  </p:cSld>
+  <p:clrMapOvr>
+    <a:masterClrMapping/>
+  </p:clrMapOvr>
+</p:notes>
+</file>
+
+<file path=ppt/notesSlides/notesSlide7.xml><?xml version="1.0" encoding="utf-8"?>
+<p:notes xmlns:a="http://schemas.openxmlformats.org/drawingml/2006/main" xmlns:r="http://schemas.openxmlformats.org/officeDocument/2006/relationships" xmlns:p="http://schemas.openxmlformats.org/presentationml/2006/main" xmlns:m="http://schemas.openxmlformats.org/officeDocument/2006/math" xmlns:w="http://schemas.openxmlformats.org/wordprocessingml/2006/main">
+  <p:cSld name="">
+    <p:spTree>
+      <p:nvGrpSpPr>
+        <p:cNvPr id="1" name=""/>
+        <p:cNvGrpSpPr/>
+        <p:nvPr/>
+      </p:nvGrpSpPr>
+      <p:grpSpPr bwMode="auto">
+        <a:xfrm>
+          <a:off x="0" y="0"/>
+          <a:ext cx="0" cy="0"/>
+          <a:chOff x="0" y="0"/>
+          <a:chExt cx="0" cy="0"/>
+        </a:xfrm>
+      </p:grpSpPr>
+      <p:sp>
+        <p:nvSpPr>
+          <p:cNvPr id="2" name="Slide Image Placeholder 1"/>
+          <p:cNvSpPr>
+            <a:spLocks noChangeAspect="1" noGrp="1" noRot="1"/>
+          </p:cNvSpPr>
+          <p:nvPr>
+            <p:ph type="sldImg"/>
+          </p:nvPr>
+        </p:nvSpPr>
+        <p:spPr bwMode="auto"/>
+      </p:sp>
+      <p:sp>
+        <p:nvSpPr>
+          <p:cNvPr id="3" name="Notes Placeholder 2"/>
+          <p:cNvSpPr>
+            <a:spLocks noGrp="1"/>
+          </p:cNvSpPr>
+          <p:nvPr>
+            <p:ph type="body" idx="1"/>
+          </p:nvPr>
+        </p:nvSpPr>
+        <p:spPr bwMode="auto"/>
+        <p:txBody>
+          <a:bodyPr/>
+          <a:lstStyle/>
+          <a:p>
+            <a:pPr>
+              <a:defRPr/>
+            </a:pPr>
+            <a:endParaRPr/>
+          </a:p>
+        </p:txBody>
+      </p:sp>
+      <p:sp>
+        <p:nvSpPr>
+          <p:cNvPr id="4" name="Slide Number Placeholder 3"/>
+          <p:cNvSpPr>
+            <a:spLocks noGrp="1"/>
+          </p:cNvSpPr>
+          <p:nvPr>
+            <p:ph type="sldNum" sz="quarter" idx="10"/>
+          </p:nvPr>
+        </p:nvSpPr>
+        <p:spPr bwMode="auto"/>
+        <p:txBody>
+          <a:bodyPr/>
+          <a:lstStyle/>
+          <a:p>
+            <a:pPr>
+              <a:defRPr/>
+            </a:pPr>
+            <a:fld id="{348C1348-693B-E51C-730E-911F438D7884}" type="slidenum">
+              <a:rPr/>
+              <a:t/>
+            </a:fld>
+            <a:endParaRPr/>
+          </a:p>
+        </p:txBody>
+      </p:sp>
+    </p:spTree>
+  </p:cSld>
+  <p:clrMapOvr>
+    <a:masterClrMapping/>
+  </p:clrMapOvr>
+</p:notes>
+</file>
+
 <file path=ppt/slideLayouts/slideLayout1.xml><?xml version="1.0" encoding="utf-8"?>
-<p:sldLayout xmlns:a="http://schemas.openxmlformats.org/drawingml/2006/main" xmlns:r="http://schemas.openxmlformats.org/officeDocument/2006/relationships" xmlns:p="http://schemas.openxmlformats.org/presentationml/2006/main" type="obj" preserve="1">
+<p:sldLayout xmlns:a="http://schemas.openxmlformats.org/drawingml/2006/main" xmlns:r="http://schemas.openxmlformats.org/officeDocument/2006/relationships" xmlns:p="http://schemas.openxmlformats.org/presentationml/2006/main" xmlns:m="http://schemas.openxmlformats.org/officeDocument/2006/math" xmlns:w="http://schemas.openxmlformats.org/wordprocessingml/2006/main" matchingName="" preserve="1" showMasterPhAnim="0" showMasterSp="1" type="obj" userDrawn="1">
   <p:cSld name="Title Slide">
     <p:spTree>
       <p:nvGrpSpPr>
@@ -49,7 +950,7 @@
         <p:cNvGrpSpPr/>
         <p:nvPr/>
       </p:nvGrpSpPr>
-      <p:grpSpPr>
+      <p:grpSpPr bwMode="auto">
         <a:xfrm>
           <a:off x="0" y="0"/>
           <a:ext cx="0" cy="0"/>
@@ -59,7 +960,7 @@
       </p:grpSpPr>
       <p:sp>
         <p:nvSpPr>
-          <p:cNvPr id="2" name="Holder 2"/>
+          <p:cNvPr id="1317037641" name="Holder 2"/>
           <p:cNvSpPr>
             <a:spLocks noGrp="1"/>
           </p:cNvSpPr>
@@ -67,7 +968,7 @@
             <p:ph type="ctrTitle"/>
           </p:nvPr>
         </p:nvSpPr>
-        <p:spPr>
+        <p:spPr bwMode="auto">
           <a:xfrm>
             <a:off x="1005840" y="3118104"/>
             <a:ext cx="11399520" cy="902876"/>
@@ -82,7 +983,7 @@
           </a:bodyPr>
           <a:lstStyle>
             <a:lvl1pPr>
-              <a:defRPr sz="5867" b="0" i="0">
+              <a:defRPr sz="5850" b="0" i="0">
                 <a:solidFill>
                   <a:srgbClr val="FF0000"/>
                 </a:solidFill>
@@ -92,13 +993,16 @@
             </a:lvl1pPr>
           </a:lstStyle>
           <a:p>
-            <a:endParaRPr/>
-          </a:p>
-        </p:txBody>
-      </p:sp>
-      <p:sp>
-        <p:nvSpPr>
-          <p:cNvPr id="3" name="Holder 3"/>
+            <a:pPr>
+              <a:defRPr/>
+            </a:pPr>
+            <a:endParaRPr/>
+          </a:p>
+        </p:txBody>
+      </p:sp>
+      <p:sp>
+        <p:nvSpPr>
+          <p:cNvPr id="1564845378" name="Holder 3"/>
           <p:cNvSpPr>
             <a:spLocks noGrp="1"/>
           </p:cNvSpPr>
@@ -106,7 +1010,7 @@
             <p:ph type="subTitle" idx="4"/>
           </p:nvPr>
         </p:nvSpPr>
-        <p:spPr>
+        <p:spPr bwMode="auto">
           <a:xfrm>
             <a:off x="2011680" y="5632706"/>
             <a:ext cx="9387840" cy="477951"/>
@@ -121,7 +1025,7 @@
           </a:bodyPr>
           <a:lstStyle>
             <a:lvl1pPr>
-              <a:defRPr sz="3106" b="0" i="0">
+              <a:defRPr sz="3100" b="0" i="0">
                 <a:solidFill>
                   <a:schemeClr val="tx1"/>
                 </a:solidFill>
@@ -131,13 +1035,16 @@
             </a:lvl1pPr>
           </a:lstStyle>
           <a:p>
-            <a:endParaRPr/>
-          </a:p>
-        </p:txBody>
-      </p:sp>
-      <p:sp>
-        <p:nvSpPr>
-          <p:cNvPr id="4" name="Holder 4"/>
+            <a:pPr>
+              <a:defRPr/>
+            </a:pPr>
+            <a:endParaRPr/>
+          </a:p>
+        </p:txBody>
+      </p:sp>
+      <p:sp>
+        <p:nvSpPr>
+          <p:cNvPr id="682862094" name="Holder 4"/>
           <p:cNvSpPr>
             <a:spLocks noGrp="1"/>
           </p:cNvSpPr>
@@ -145,7 +1052,7 @@
             <p:ph type="ftr" sz="quarter" idx="5"/>
           </p:nvPr>
         </p:nvSpPr>
-        <p:spPr/>
+        <p:spPr bwMode="auto"/>
         <p:txBody>
           <a:bodyPr lIns="0" tIns="0" rIns="0" bIns="0"/>
           <a:lstStyle>
@@ -160,13 +1067,16 @@
             </a:lvl1pPr>
           </a:lstStyle>
           <a:p>
-            <a:endParaRPr/>
-          </a:p>
-        </p:txBody>
-      </p:sp>
-      <p:sp>
-        <p:nvSpPr>
-          <p:cNvPr id="5" name="Holder 5"/>
+            <a:pPr>
+              <a:defRPr/>
+            </a:pPr>
+            <a:endParaRPr/>
+          </a:p>
+        </p:txBody>
+      </p:sp>
+      <p:sp>
+        <p:nvSpPr>
+          <p:cNvPr id="1736468624" name="Holder 5"/>
           <p:cNvSpPr>
             <a:spLocks noGrp="1"/>
           </p:cNvSpPr>
@@ -174,7 +1084,7 @@
             <p:ph type="dt" sz="half" idx="6"/>
           </p:nvPr>
         </p:nvSpPr>
-        <p:spPr/>
+        <p:spPr bwMode="auto"/>
         <p:txBody>
           <a:bodyPr lIns="0" tIns="0" rIns="0" bIns="0"/>
           <a:lstStyle>
@@ -189,6 +1099,9 @@
             </a:lvl1pPr>
           </a:lstStyle>
           <a:p>
+            <a:pPr>
+              <a:defRPr/>
+            </a:pPr>
             <a:fld id="{1D8BD707-D9CF-40AE-B4C6-C98DA3205C09}" type="datetimeFigureOut">
               <a:rPr lang="en-US"/>
               <a:t>12/30/2025</a:t>
@@ -199,7 +1112,7 @@
       </p:sp>
       <p:sp>
         <p:nvSpPr>
-          <p:cNvPr id="6" name="Holder 6"/>
+          <p:cNvPr id="1693005356" name="Holder 6"/>
           <p:cNvSpPr>
             <a:spLocks noGrp="1"/>
           </p:cNvSpPr>
@@ -207,7 +1120,7 @@
             <p:ph type="sldNum" sz="quarter" idx="7"/>
           </p:nvPr>
         </p:nvSpPr>
-        <p:spPr/>
+        <p:spPr bwMode="auto"/>
         <p:txBody>
           <a:bodyPr lIns="0" tIns="0" rIns="0" bIns="0"/>
           <a:lstStyle>
@@ -222,7 +1135,11 @@
             </a:lvl1pPr>
           </a:lstStyle>
           <a:p>
+            <a:pPr>
+              <a:defRPr/>
+            </a:pPr>
             <a:fld id="{B6F15528-21DE-4FAA-801E-634DDDAF4B2B}" type="slidenum">
+              <a:rPr/>
               <a:t>‹#›</a:t>
             </a:fld>
             <a:endParaRPr/>
@@ -238,14 +1155,13 @@
 </file>
 
 <file path=ppt/slideLayouts/slideLayout2.xml><?xml version="1.0" encoding="utf-8"?>
-<p:sldLayout xmlns:a="http://schemas.openxmlformats.org/drawingml/2006/main" xmlns:r="http://schemas.openxmlformats.org/officeDocument/2006/relationships" xmlns:p="http://schemas.openxmlformats.org/presentationml/2006/main" showMasterSp="0" type="obj" preserve="1">
+<p:sldLayout xmlns:a="http://schemas.openxmlformats.org/drawingml/2006/main" xmlns:r="http://schemas.openxmlformats.org/officeDocument/2006/relationships" xmlns:p="http://schemas.openxmlformats.org/presentationml/2006/main" xmlns:m="http://schemas.openxmlformats.org/officeDocument/2006/math" xmlns:w="http://schemas.openxmlformats.org/wordprocessingml/2006/main" matchingName="" preserve="1" showMasterPhAnim="0" showMasterSp="0" type="obj" userDrawn="1">
   <p:cSld name="Title and Content">
     <p:bg>
-      <p:bgPr>
+      <p:bgPr shadeToTitle="0">
         <a:solidFill>
           <a:schemeClr val="bg1"/>
         </a:solidFill>
-        <a:effectLst/>
       </p:bgPr>
     </p:bg>
     <p:spTree>
@@ -254,7 +1170,7 @@
         <p:cNvGrpSpPr/>
         <p:nvPr/>
       </p:nvGrpSpPr>
-      <p:grpSpPr>
+      <p:grpSpPr bwMode="auto">
         <a:xfrm>
           <a:off x="0" y="0"/>
           <a:ext cx="0" cy="0"/>
@@ -264,11 +1180,11 @@
       </p:grpSpPr>
       <p:sp>
         <p:nvSpPr>
-          <p:cNvPr id="16" name="bg object 16"/>
+          <p:cNvPr id="1440691743" name="bg object 16"/>
           <p:cNvSpPr/>
           <p:nvPr/>
         </p:nvSpPr>
-        <p:spPr>
+        <p:spPr bwMode="auto">
           <a:xfrm>
             <a:off x="331334" y="2514600"/>
             <a:ext cx="12753788" cy="4142104"/>
@@ -280,7 +1196,7 @@
             <a:cxnLst/>
             <a:rect l="l" t="t" r="r" b="b"/>
             <a:pathLst>
-              <a:path w="7391400" h="4142104">
+              <a:path w="7391400" h="4142104" fill="norm" stroke="1" extrusionOk="0">
                 <a:moveTo>
                   <a:pt x="0" y="4141597"/>
                 </a:moveTo>
@@ -310,13 +1226,16 @@
           <a:bodyPr wrap="square" lIns="0" tIns="0" rIns="0" bIns="0" rtlCol="0"/>
           <a:lstStyle/>
           <a:p>
-            <a:endParaRPr/>
-          </a:p>
-        </p:txBody>
-      </p:sp>
-      <p:sp>
-        <p:nvSpPr>
-          <p:cNvPr id="2" name="Holder 2"/>
+            <a:pPr>
+              <a:defRPr/>
+            </a:pPr>
+            <a:endParaRPr/>
+          </a:p>
+        </p:txBody>
+      </p:sp>
+      <p:sp>
+        <p:nvSpPr>
+          <p:cNvPr id="504997099" name="Holder 2"/>
           <p:cNvSpPr>
             <a:spLocks noGrp="1"/>
           </p:cNvSpPr>
@@ -324,7 +1243,7 @@
             <p:ph type="title"/>
           </p:nvPr>
         </p:nvSpPr>
-        <p:spPr>
+        <p:spPr bwMode="auto">
           <a:xfrm>
             <a:off x="4117587" y="3823463"/>
             <a:ext cx="7712317" cy="902876"/>
@@ -334,7 +1253,7 @@
           <a:bodyPr lIns="0" tIns="0" rIns="0" bIns="0"/>
           <a:lstStyle>
             <a:lvl1pPr>
-              <a:defRPr sz="5867" b="0" i="0">
+              <a:defRPr sz="5850" b="0" i="0">
                 <a:solidFill>
                   <a:srgbClr val="FF0000"/>
                 </a:solidFill>
@@ -344,13 +1263,16 @@
             </a:lvl1pPr>
           </a:lstStyle>
           <a:p>
-            <a:endParaRPr/>
-          </a:p>
-        </p:txBody>
-      </p:sp>
-      <p:sp>
-        <p:nvSpPr>
-          <p:cNvPr id="3" name="Holder 3"/>
+            <a:pPr>
+              <a:defRPr/>
+            </a:pPr>
+            <a:endParaRPr/>
+          </a:p>
+        </p:txBody>
+      </p:sp>
+      <p:sp>
+        <p:nvSpPr>
+          <p:cNvPr id="184569626" name="Holder 3"/>
           <p:cNvSpPr>
             <a:spLocks noGrp="1"/>
           </p:cNvSpPr>
@@ -358,17 +1280,17 @@
             <p:ph type="body" idx="1"/>
           </p:nvPr>
         </p:nvSpPr>
-        <p:spPr>
+        <p:spPr bwMode="auto">
           <a:xfrm>
             <a:off x="617089" y="3228215"/>
-            <a:ext cx="7643507" cy="477951"/>
+            <a:ext cx="7643506" cy="477951"/>
           </a:xfrm>
         </p:spPr>
         <p:txBody>
           <a:bodyPr lIns="0" tIns="0" rIns="0" bIns="0"/>
           <a:lstStyle>
             <a:lvl1pPr>
-              <a:defRPr sz="3106" b="0" i="0">
+              <a:defRPr sz="3100" b="0" i="0">
                 <a:solidFill>
                   <a:schemeClr val="tx1"/>
                 </a:solidFill>
@@ -378,13 +1300,16 @@
             </a:lvl1pPr>
           </a:lstStyle>
           <a:p>
-            <a:endParaRPr/>
-          </a:p>
-        </p:txBody>
-      </p:sp>
-      <p:sp>
-        <p:nvSpPr>
-          <p:cNvPr id="4" name="Holder 4"/>
+            <a:pPr>
+              <a:defRPr/>
+            </a:pPr>
+            <a:endParaRPr/>
+          </a:p>
+        </p:txBody>
+      </p:sp>
+      <p:sp>
+        <p:nvSpPr>
+          <p:cNvPr id="1171852623" name="Holder 4"/>
           <p:cNvSpPr>
             <a:spLocks noGrp="1"/>
           </p:cNvSpPr>
@@ -392,7 +1317,7 @@
             <p:ph type="ftr" sz="quarter" idx="5"/>
           </p:nvPr>
         </p:nvSpPr>
-        <p:spPr/>
+        <p:spPr bwMode="auto"/>
         <p:txBody>
           <a:bodyPr lIns="0" tIns="0" rIns="0" bIns="0"/>
           <a:lstStyle>
@@ -407,13 +1332,16 @@
             </a:lvl1pPr>
           </a:lstStyle>
           <a:p>
-            <a:endParaRPr/>
-          </a:p>
-        </p:txBody>
-      </p:sp>
-      <p:sp>
-        <p:nvSpPr>
-          <p:cNvPr id="5" name="Holder 5"/>
+            <a:pPr>
+              <a:defRPr/>
+            </a:pPr>
+            <a:endParaRPr/>
+          </a:p>
+        </p:txBody>
+      </p:sp>
+      <p:sp>
+        <p:nvSpPr>
+          <p:cNvPr id="145025360" name="Holder 5"/>
           <p:cNvSpPr>
             <a:spLocks noGrp="1"/>
           </p:cNvSpPr>
@@ -421,7 +1349,7 @@
             <p:ph type="dt" sz="half" idx="6"/>
           </p:nvPr>
         </p:nvSpPr>
-        <p:spPr/>
+        <p:spPr bwMode="auto"/>
         <p:txBody>
           <a:bodyPr lIns="0" tIns="0" rIns="0" bIns="0"/>
           <a:lstStyle>
@@ -436,6 +1364,9 @@
             </a:lvl1pPr>
           </a:lstStyle>
           <a:p>
+            <a:pPr>
+              <a:defRPr/>
+            </a:pPr>
             <a:fld id="{1D8BD707-D9CF-40AE-B4C6-C98DA3205C09}" type="datetimeFigureOut">
               <a:rPr lang="en-US"/>
               <a:t>12/30/2025</a:t>
@@ -446,7 +1377,7 @@
       </p:sp>
       <p:sp>
         <p:nvSpPr>
-          <p:cNvPr id="6" name="Holder 6"/>
+          <p:cNvPr id="24911303" name="Holder 6"/>
           <p:cNvSpPr>
             <a:spLocks noGrp="1"/>
           </p:cNvSpPr>
@@ -454,7 +1385,7 @@
             <p:ph type="sldNum" sz="quarter" idx="7"/>
           </p:nvPr>
         </p:nvSpPr>
-        <p:spPr/>
+        <p:spPr bwMode="auto"/>
         <p:txBody>
           <a:bodyPr lIns="0" tIns="0" rIns="0" bIns="0"/>
           <a:lstStyle>
@@ -469,7 +1400,11 @@
             </a:lvl1pPr>
           </a:lstStyle>
           <a:p>
+            <a:pPr>
+              <a:defRPr/>
+            </a:pPr>
             <a:fld id="{B6F15528-21DE-4FAA-801E-634DDDAF4B2B}" type="slidenum">
+              <a:rPr/>
               <a:t>‹#›</a:t>
             </a:fld>
             <a:endParaRPr/>
@@ -485,7 +1420,7 @@
 </file>
 
 <file path=ppt/slideLayouts/slideLayout3.xml><?xml version="1.0" encoding="utf-8"?>
-<p:sldLayout xmlns:a="http://schemas.openxmlformats.org/drawingml/2006/main" xmlns:r="http://schemas.openxmlformats.org/officeDocument/2006/relationships" xmlns:p="http://schemas.openxmlformats.org/presentationml/2006/main" type="obj" preserve="1">
+<p:sldLayout xmlns:a="http://schemas.openxmlformats.org/drawingml/2006/main" xmlns:r="http://schemas.openxmlformats.org/officeDocument/2006/relationships" xmlns:p="http://schemas.openxmlformats.org/presentationml/2006/main" xmlns:m="http://schemas.openxmlformats.org/officeDocument/2006/math" xmlns:w="http://schemas.openxmlformats.org/wordprocessingml/2006/main" matchingName="" preserve="1" showMasterPhAnim="0" showMasterSp="1" type="obj" userDrawn="1">
   <p:cSld name="Two Content">
     <p:spTree>
       <p:nvGrpSpPr>
@@ -493,7 +1428,7 @@
         <p:cNvGrpSpPr/>
         <p:nvPr/>
       </p:nvGrpSpPr>
-      <p:grpSpPr>
+      <p:grpSpPr bwMode="auto">
         <a:xfrm>
           <a:off x="0" y="0"/>
           <a:ext cx="0" cy="0"/>
@@ -503,7 +1438,7 @@
       </p:grpSpPr>
       <p:sp>
         <p:nvSpPr>
-          <p:cNvPr id="2" name="Holder 2"/>
+          <p:cNvPr id="2015144782" name="Holder 2"/>
           <p:cNvSpPr>
             <a:spLocks noGrp="1"/>
           </p:cNvSpPr>
@@ -511,7 +1446,7 @@
             <p:ph type="title"/>
           </p:nvPr>
         </p:nvSpPr>
-        <p:spPr>
+        <p:spPr bwMode="auto">
           <a:xfrm>
             <a:off x="4117587" y="3823463"/>
             <a:ext cx="7712317" cy="902876"/>
@@ -521,7 +1456,7 @@
           <a:bodyPr lIns="0" tIns="0" rIns="0" bIns="0"/>
           <a:lstStyle>
             <a:lvl1pPr>
-              <a:defRPr sz="5867" b="0" i="0">
+              <a:defRPr sz="5850" b="0" i="0">
                 <a:solidFill>
                   <a:srgbClr val="FF0000"/>
                 </a:solidFill>
@@ -531,13 +1466,16 @@
             </a:lvl1pPr>
           </a:lstStyle>
           <a:p>
-            <a:endParaRPr/>
-          </a:p>
-        </p:txBody>
-      </p:sp>
-      <p:sp>
-        <p:nvSpPr>
-          <p:cNvPr id="3" name="Holder 3"/>
+            <a:pPr>
+              <a:defRPr/>
+            </a:pPr>
+            <a:endParaRPr/>
+          </a:p>
+        </p:txBody>
+      </p:sp>
+      <p:sp>
+        <p:nvSpPr>
+          <p:cNvPr id="679924015" name="Holder 3"/>
           <p:cNvSpPr>
             <a:spLocks noGrp="1"/>
           </p:cNvSpPr>
@@ -545,7 +1483,7 @@
             <p:ph sz="half" idx="2"/>
           </p:nvPr>
         </p:nvSpPr>
-        <p:spPr>
+        <p:spPr bwMode="auto">
           <a:xfrm>
             <a:off x="670560" y="2313434"/>
             <a:ext cx="5833872" cy="276999"/>
@@ -564,13 +1502,16 @@
             </a:lvl1pPr>
           </a:lstStyle>
           <a:p>
-            <a:endParaRPr/>
-          </a:p>
-        </p:txBody>
-      </p:sp>
-      <p:sp>
-        <p:nvSpPr>
-          <p:cNvPr id="4" name="Holder 4"/>
+            <a:pPr>
+              <a:defRPr/>
+            </a:pPr>
+            <a:endParaRPr/>
+          </a:p>
+        </p:txBody>
+      </p:sp>
+      <p:sp>
+        <p:nvSpPr>
+          <p:cNvPr id="134618093" name="Holder 4"/>
           <p:cNvSpPr>
             <a:spLocks noGrp="1"/>
           </p:cNvSpPr>
@@ -578,7 +1519,7 @@
             <p:ph sz="half" idx="3"/>
           </p:nvPr>
         </p:nvSpPr>
-        <p:spPr>
+        <p:spPr bwMode="auto">
           <a:xfrm>
             <a:off x="6906768" y="2313434"/>
             <a:ext cx="5833872" cy="276999"/>
@@ -597,13 +1538,16 @@
             </a:lvl1pPr>
           </a:lstStyle>
           <a:p>
-            <a:endParaRPr/>
-          </a:p>
-        </p:txBody>
-      </p:sp>
-      <p:sp>
-        <p:nvSpPr>
-          <p:cNvPr id="5" name="Holder 5"/>
+            <a:pPr>
+              <a:defRPr/>
+            </a:pPr>
+            <a:endParaRPr/>
+          </a:p>
+        </p:txBody>
+      </p:sp>
+      <p:sp>
+        <p:nvSpPr>
+          <p:cNvPr id="1581056469" name="Holder 5"/>
           <p:cNvSpPr>
             <a:spLocks noGrp="1"/>
           </p:cNvSpPr>
@@ -611,7 +1555,7 @@
             <p:ph type="ftr" sz="quarter" idx="5"/>
           </p:nvPr>
         </p:nvSpPr>
-        <p:spPr/>
+        <p:spPr bwMode="auto"/>
         <p:txBody>
           <a:bodyPr lIns="0" tIns="0" rIns="0" bIns="0"/>
           <a:lstStyle>
@@ -626,13 +1570,16 @@
             </a:lvl1pPr>
           </a:lstStyle>
           <a:p>
-            <a:endParaRPr/>
-          </a:p>
-        </p:txBody>
-      </p:sp>
-      <p:sp>
-        <p:nvSpPr>
-          <p:cNvPr id="6" name="Holder 6"/>
+            <a:pPr>
+              <a:defRPr/>
+            </a:pPr>
+            <a:endParaRPr/>
+          </a:p>
+        </p:txBody>
+      </p:sp>
+      <p:sp>
+        <p:nvSpPr>
+          <p:cNvPr id="2021689454" name="Holder 6"/>
           <p:cNvSpPr>
             <a:spLocks noGrp="1"/>
           </p:cNvSpPr>
@@ -640,7 +1587,7 @@
             <p:ph type="dt" sz="half" idx="6"/>
           </p:nvPr>
         </p:nvSpPr>
-        <p:spPr/>
+        <p:spPr bwMode="auto"/>
         <p:txBody>
           <a:bodyPr lIns="0" tIns="0" rIns="0" bIns="0"/>
           <a:lstStyle>
@@ -655,6 +1602,9 @@
             </a:lvl1pPr>
           </a:lstStyle>
           <a:p>
+            <a:pPr>
+              <a:defRPr/>
+            </a:pPr>
             <a:fld id="{1D8BD707-D9CF-40AE-B4C6-C98DA3205C09}" type="datetimeFigureOut">
               <a:rPr lang="en-US"/>
               <a:t>12/30/2025</a:t>
@@ -665,7 +1615,7 @@
       </p:sp>
       <p:sp>
         <p:nvSpPr>
-          <p:cNvPr id="7" name="Holder 7"/>
+          <p:cNvPr id="1680659263" name="Holder 7"/>
           <p:cNvSpPr>
             <a:spLocks noGrp="1"/>
           </p:cNvSpPr>
@@ -673,7 +1623,7 @@
             <p:ph type="sldNum" sz="quarter" idx="7"/>
           </p:nvPr>
         </p:nvSpPr>
-        <p:spPr/>
+        <p:spPr bwMode="auto"/>
         <p:txBody>
           <a:bodyPr lIns="0" tIns="0" rIns="0" bIns="0"/>
           <a:lstStyle>
@@ -688,7 +1638,11 @@
             </a:lvl1pPr>
           </a:lstStyle>
           <a:p>
+            <a:pPr>
+              <a:defRPr/>
+            </a:pPr>
             <a:fld id="{B6F15528-21DE-4FAA-801E-634DDDAF4B2B}" type="slidenum">
+              <a:rPr/>
               <a:t>‹#›</a:t>
             </a:fld>
             <a:endParaRPr/>
@@ -704,14 +1658,13 @@
 </file>
 
 <file path=ppt/slideLayouts/slideLayout4.xml><?xml version="1.0" encoding="utf-8"?>
-<p:sldLayout xmlns:a="http://schemas.openxmlformats.org/drawingml/2006/main" xmlns:r="http://schemas.openxmlformats.org/officeDocument/2006/relationships" xmlns:p="http://schemas.openxmlformats.org/presentationml/2006/main" showMasterSp="0" type="obj" preserve="1">
+<p:sldLayout xmlns:a="http://schemas.openxmlformats.org/drawingml/2006/main" xmlns:r="http://schemas.openxmlformats.org/officeDocument/2006/relationships" xmlns:p="http://schemas.openxmlformats.org/presentationml/2006/main" xmlns:m="http://schemas.openxmlformats.org/officeDocument/2006/math" xmlns:w="http://schemas.openxmlformats.org/wordprocessingml/2006/main" matchingName="" preserve="1" showMasterPhAnim="0" showMasterSp="0" type="obj" userDrawn="1">
   <p:cSld name="Title Only">
     <p:bg>
-      <p:bgPr>
+      <p:bgPr shadeToTitle="0">
         <a:solidFill>
           <a:schemeClr val="bg1"/>
         </a:solidFill>
-        <a:effectLst/>
       </p:bgPr>
     </p:bg>
     <p:spTree>
@@ -720,7 +1673,7 @@
         <p:cNvGrpSpPr/>
         <p:nvPr/>
       </p:nvGrpSpPr>
-      <p:grpSpPr>
+      <p:grpSpPr bwMode="auto">
         <a:xfrm>
           <a:off x="0" y="0"/>
           <a:ext cx="0" cy="0"/>
@@ -730,17 +1683,15 @@
       </p:grpSpPr>
       <p:pic>
         <p:nvPicPr>
-          <p:cNvPr id="16" name="bg object 16"/>
+          <p:cNvPr id="1563749490" name="bg object 16"/>
           <p:cNvPicPr/>
           <p:nvPr/>
         </p:nvPicPr>
-        <p:blipFill>
-          <a:blip r:embed="rId2" cstate="print"/>
-          <a:stretch>
-            <a:fillRect/>
-          </a:stretch>
+        <p:blipFill rotWithShape="1">
+          <a:blip r:embed="rId2"/>
+          <a:stretch/>
         </p:blipFill>
-        <p:spPr>
+        <p:spPr bwMode="auto">
           <a:xfrm>
             <a:off x="3" y="2209800"/>
             <a:ext cx="13411198" cy="5081016"/>
@@ -752,11 +1703,11 @@
       </p:pic>
       <p:sp>
         <p:nvSpPr>
-          <p:cNvPr id="17" name="bg object 17"/>
+          <p:cNvPr id="507256081" name="bg object 17"/>
           <p:cNvSpPr/>
           <p:nvPr/>
         </p:nvSpPr>
-        <p:spPr>
+        <p:spPr bwMode="auto">
           <a:xfrm>
             <a:off x="105186" y="3901439"/>
             <a:ext cx="13306014" cy="789940"/>
@@ -768,7 +1719,7 @@
             <a:cxnLst/>
             <a:rect l="l" t="t" r="r" b="b"/>
             <a:pathLst>
-              <a:path w="7711440" h="789939">
+              <a:path w="7711440" h="789939" fill="norm" stroke="1" extrusionOk="0">
                 <a:moveTo>
                   <a:pt x="0" y="789431"/>
                 </a:moveTo>
@@ -798,13 +1749,16 @@
           <a:bodyPr wrap="square" lIns="0" tIns="0" rIns="0" bIns="0" rtlCol="0"/>
           <a:lstStyle/>
           <a:p>
-            <a:endParaRPr/>
-          </a:p>
-        </p:txBody>
-      </p:sp>
-      <p:sp>
-        <p:nvSpPr>
-          <p:cNvPr id="2" name="Holder 2"/>
+            <a:pPr>
+              <a:defRPr/>
+            </a:pPr>
+            <a:endParaRPr/>
+          </a:p>
+        </p:txBody>
+      </p:sp>
+      <p:sp>
+        <p:nvSpPr>
+          <p:cNvPr id="657180967" name="Holder 2"/>
           <p:cNvSpPr>
             <a:spLocks noGrp="1"/>
           </p:cNvSpPr>
@@ -812,7 +1766,7 @@
             <p:ph type="title"/>
           </p:nvPr>
         </p:nvSpPr>
-        <p:spPr>
+        <p:spPr bwMode="auto">
           <a:xfrm>
             <a:off x="4117587" y="3823463"/>
             <a:ext cx="7712317" cy="902876"/>
@@ -822,7 +1776,7 @@
           <a:bodyPr lIns="0" tIns="0" rIns="0" bIns="0"/>
           <a:lstStyle>
             <a:lvl1pPr>
-              <a:defRPr sz="5867" b="0" i="0">
+              <a:defRPr sz="5850" b="0" i="0">
                 <a:solidFill>
                   <a:srgbClr val="FF0000"/>
                 </a:solidFill>
@@ -832,13 +1786,16 @@
             </a:lvl1pPr>
           </a:lstStyle>
           <a:p>
-            <a:endParaRPr/>
-          </a:p>
-        </p:txBody>
-      </p:sp>
-      <p:sp>
-        <p:nvSpPr>
-          <p:cNvPr id="3" name="Holder 3"/>
+            <a:pPr>
+              <a:defRPr/>
+            </a:pPr>
+            <a:endParaRPr/>
+          </a:p>
+        </p:txBody>
+      </p:sp>
+      <p:sp>
+        <p:nvSpPr>
+          <p:cNvPr id="459531664" name="Holder 3"/>
           <p:cNvSpPr>
             <a:spLocks noGrp="1"/>
           </p:cNvSpPr>
@@ -846,7 +1803,7 @@
             <p:ph type="ftr" sz="quarter" idx="5"/>
           </p:nvPr>
         </p:nvSpPr>
-        <p:spPr/>
+        <p:spPr bwMode="auto"/>
         <p:txBody>
           <a:bodyPr lIns="0" tIns="0" rIns="0" bIns="0"/>
           <a:lstStyle>
@@ -861,13 +1818,16 @@
             </a:lvl1pPr>
           </a:lstStyle>
           <a:p>
-            <a:endParaRPr/>
-          </a:p>
-        </p:txBody>
-      </p:sp>
-      <p:sp>
-        <p:nvSpPr>
-          <p:cNvPr id="4" name="Holder 4"/>
+            <a:pPr>
+              <a:defRPr/>
+            </a:pPr>
+            <a:endParaRPr/>
+          </a:p>
+        </p:txBody>
+      </p:sp>
+      <p:sp>
+        <p:nvSpPr>
+          <p:cNvPr id="792826797" name="Holder 4"/>
           <p:cNvSpPr>
             <a:spLocks noGrp="1"/>
           </p:cNvSpPr>
@@ -875,7 +1835,7 @@
             <p:ph type="dt" sz="half" idx="6"/>
           </p:nvPr>
         </p:nvSpPr>
-        <p:spPr/>
+        <p:spPr bwMode="auto"/>
         <p:txBody>
           <a:bodyPr lIns="0" tIns="0" rIns="0" bIns="0"/>
           <a:lstStyle>
@@ -890,6 +1850,9 @@
             </a:lvl1pPr>
           </a:lstStyle>
           <a:p>
+            <a:pPr>
+              <a:defRPr/>
+            </a:pPr>
             <a:fld id="{1D8BD707-D9CF-40AE-B4C6-C98DA3205C09}" type="datetimeFigureOut">
               <a:rPr lang="en-US"/>
               <a:t>12/30/2025</a:t>
@@ -900,7 +1863,7 @@
       </p:sp>
       <p:sp>
         <p:nvSpPr>
-          <p:cNvPr id="5" name="Holder 5"/>
+          <p:cNvPr id="595286827" name="Holder 5"/>
           <p:cNvSpPr>
             <a:spLocks noGrp="1"/>
           </p:cNvSpPr>
@@ -908,7 +1871,7 @@
             <p:ph type="sldNum" sz="quarter" idx="7"/>
           </p:nvPr>
         </p:nvSpPr>
-        <p:spPr/>
+        <p:spPr bwMode="auto"/>
         <p:txBody>
           <a:bodyPr lIns="0" tIns="0" rIns="0" bIns="0"/>
           <a:lstStyle>
@@ -923,7 +1886,11 @@
             </a:lvl1pPr>
           </a:lstStyle>
           <a:p>
+            <a:pPr>
+              <a:defRPr/>
+            </a:pPr>
             <a:fld id="{B6F15528-21DE-4FAA-801E-634DDDAF4B2B}" type="slidenum">
+              <a:rPr/>
               <a:t>‹#›</a:t>
             </a:fld>
             <a:endParaRPr/>
@@ -939,7 +1906,7 @@
 </file>
 
 <file path=ppt/slideLayouts/slideLayout5.xml><?xml version="1.0" encoding="utf-8"?>
-<p:sldLayout xmlns:a="http://schemas.openxmlformats.org/drawingml/2006/main" xmlns:r="http://schemas.openxmlformats.org/officeDocument/2006/relationships" xmlns:p="http://schemas.openxmlformats.org/presentationml/2006/main" type="obj" preserve="1">
+<p:sldLayout xmlns:a="http://schemas.openxmlformats.org/drawingml/2006/main" xmlns:r="http://schemas.openxmlformats.org/officeDocument/2006/relationships" xmlns:p="http://schemas.openxmlformats.org/presentationml/2006/main" xmlns:m="http://schemas.openxmlformats.org/officeDocument/2006/math" xmlns:w="http://schemas.openxmlformats.org/wordprocessingml/2006/main" matchingName="" preserve="1" showMasterPhAnim="0" showMasterSp="1" type="obj" userDrawn="1">
   <p:cSld name="Blank">
     <p:spTree>
       <p:nvGrpSpPr>
@@ -947,7 +1914,7 @@
         <p:cNvGrpSpPr/>
         <p:nvPr/>
       </p:nvGrpSpPr>
-      <p:grpSpPr>
+      <p:grpSpPr bwMode="auto">
         <a:xfrm>
           <a:off x="0" y="0"/>
           <a:ext cx="0" cy="0"/>
@@ -957,7 +1924,7 @@
       </p:grpSpPr>
       <p:sp>
         <p:nvSpPr>
-          <p:cNvPr id="2" name="Holder 2"/>
+          <p:cNvPr id="607085542" name="Holder 2"/>
           <p:cNvSpPr>
             <a:spLocks noGrp="1"/>
           </p:cNvSpPr>
@@ -965,7 +1932,7 @@
             <p:ph type="ftr" sz="quarter" idx="5"/>
           </p:nvPr>
         </p:nvSpPr>
-        <p:spPr/>
+        <p:spPr bwMode="auto"/>
         <p:txBody>
           <a:bodyPr lIns="0" tIns="0" rIns="0" bIns="0"/>
           <a:lstStyle>
@@ -980,13 +1947,16 @@
             </a:lvl1pPr>
           </a:lstStyle>
           <a:p>
-            <a:endParaRPr/>
-          </a:p>
-        </p:txBody>
-      </p:sp>
-      <p:sp>
-        <p:nvSpPr>
-          <p:cNvPr id="3" name="Holder 3"/>
+            <a:pPr>
+              <a:defRPr/>
+            </a:pPr>
+            <a:endParaRPr/>
+          </a:p>
+        </p:txBody>
+      </p:sp>
+      <p:sp>
+        <p:nvSpPr>
+          <p:cNvPr id="401794076" name="Holder 3"/>
           <p:cNvSpPr>
             <a:spLocks noGrp="1"/>
           </p:cNvSpPr>
@@ -994,7 +1964,7 @@
             <p:ph type="dt" sz="half" idx="6"/>
           </p:nvPr>
         </p:nvSpPr>
-        <p:spPr/>
+        <p:spPr bwMode="auto"/>
         <p:txBody>
           <a:bodyPr lIns="0" tIns="0" rIns="0" bIns="0"/>
           <a:lstStyle>
@@ -1009,6 +1979,9 @@
             </a:lvl1pPr>
           </a:lstStyle>
           <a:p>
+            <a:pPr>
+              <a:defRPr/>
+            </a:pPr>
             <a:fld id="{1D8BD707-D9CF-40AE-B4C6-C98DA3205C09}" type="datetimeFigureOut">
               <a:rPr lang="en-US"/>
               <a:t>12/30/2025</a:t>
@@ -1019,7 +1992,7 @@
       </p:sp>
       <p:sp>
         <p:nvSpPr>
-          <p:cNvPr id="4" name="Holder 4"/>
+          <p:cNvPr id="96801334" name="Holder 4"/>
           <p:cNvSpPr>
             <a:spLocks noGrp="1"/>
           </p:cNvSpPr>
@@ -1027,7 +2000,7 @@
             <p:ph type="sldNum" sz="quarter" idx="7"/>
           </p:nvPr>
         </p:nvSpPr>
-        <p:spPr/>
+        <p:spPr bwMode="auto"/>
         <p:txBody>
           <a:bodyPr lIns="0" tIns="0" rIns="0" bIns="0"/>
           <a:lstStyle>
@@ -1042,7 +2015,11 @@
             </a:lvl1pPr>
           </a:lstStyle>
           <a:p>
+            <a:pPr>
+              <a:defRPr/>
+            </a:pPr>
             <a:fld id="{B6F15528-21DE-4FAA-801E-634DDDAF4B2B}" type="slidenum">
+              <a:rPr/>
               <a:t>‹#›</a:t>
             </a:fld>
             <a:endParaRPr/>
@@ -1058,14 +2035,13 @@
 </file>
 
 <file path=ppt/slideMasters/slideMaster1.xml><?xml version="1.0" encoding="utf-8"?>
-<p:sldMaster xmlns:a="http://schemas.openxmlformats.org/drawingml/2006/main" xmlns:r="http://schemas.openxmlformats.org/officeDocument/2006/relationships" xmlns:p="http://schemas.openxmlformats.org/presentationml/2006/main">
-  <p:cSld>
+<p:sldMaster xmlns:a="http://schemas.openxmlformats.org/drawingml/2006/main" xmlns:r="http://schemas.openxmlformats.org/officeDocument/2006/relationships" xmlns:p="http://schemas.openxmlformats.org/presentationml/2006/main" xmlns:m="http://schemas.openxmlformats.org/officeDocument/2006/math" xmlns:w="http://schemas.openxmlformats.org/wordprocessingml/2006/main" preserve="0">
+  <p:cSld name="">
     <p:bg>
-      <p:bgPr>
+      <p:bgPr shadeToTitle="0">
         <a:solidFill>
           <a:schemeClr val="bg1"/>
         </a:solidFill>
-        <a:effectLst/>
       </p:bgPr>
     </p:bg>
     <p:spTree>
@@ -1074,7 +2050,7 @@
         <p:cNvGrpSpPr/>
         <p:nvPr/>
       </p:nvGrpSpPr>
-      <p:grpSpPr>
+      <p:grpSpPr bwMode="auto">
         <a:xfrm>
           <a:off x="0" y="0"/>
           <a:ext cx="0" cy="0"/>
@@ -1084,7 +2060,7 @@
       </p:grpSpPr>
       <p:sp>
         <p:nvSpPr>
-          <p:cNvPr id="2" name="Holder 2"/>
+          <p:cNvPr id="141126268" name="Holder 2"/>
           <p:cNvSpPr>
             <a:spLocks noGrp="1"/>
           </p:cNvSpPr>
@@ -1092,7 +2068,7 @@
             <p:ph type="title"/>
           </p:nvPr>
         </p:nvSpPr>
-        <p:spPr>
+        <p:spPr bwMode="auto">
           <a:xfrm>
             <a:off x="4117587" y="3823463"/>
             <a:ext cx="7712317" cy="523220"/>
@@ -1117,13 +2093,16 @@
             </a:lvl1pPr>
           </a:lstStyle>
           <a:p>
-            <a:endParaRPr/>
-          </a:p>
-        </p:txBody>
-      </p:sp>
-      <p:sp>
-        <p:nvSpPr>
-          <p:cNvPr id="3" name="Holder 3"/>
+            <a:pPr>
+              <a:defRPr/>
+            </a:pPr>
+            <a:endParaRPr/>
+          </a:p>
+        </p:txBody>
+      </p:sp>
+      <p:sp>
+        <p:nvSpPr>
+          <p:cNvPr id="989273462" name="Holder 3"/>
           <p:cNvSpPr>
             <a:spLocks noGrp="1"/>
           </p:cNvSpPr>
@@ -1131,10 +2110,10 @@
             <p:ph type="body" idx="1"/>
           </p:nvPr>
         </p:nvSpPr>
-        <p:spPr>
+        <p:spPr bwMode="auto">
           <a:xfrm>
             <a:off x="617089" y="3228213"/>
-            <a:ext cx="7643507" cy="276999"/>
+            <a:ext cx="7643506" cy="276999"/>
           </a:xfrm>
           <a:prstGeom prst="rect">
             <a:avLst/>
@@ -1156,13 +2135,16 @@
             </a:lvl1pPr>
           </a:lstStyle>
           <a:p>
-            <a:endParaRPr/>
-          </a:p>
-        </p:txBody>
-      </p:sp>
-      <p:sp>
-        <p:nvSpPr>
-          <p:cNvPr id="4" name="Holder 4"/>
+            <a:pPr>
+              <a:defRPr/>
+            </a:pPr>
+            <a:endParaRPr/>
+          </a:p>
+        </p:txBody>
+      </p:sp>
+      <p:sp>
+        <p:nvSpPr>
+          <p:cNvPr id="871644864" name="Holder 4"/>
           <p:cNvSpPr>
             <a:spLocks noGrp="1"/>
           </p:cNvSpPr>
@@ -1170,7 +2152,7 @@
             <p:ph type="ftr" sz="quarter" idx="5"/>
           </p:nvPr>
         </p:nvSpPr>
-        <p:spPr>
+        <p:spPr bwMode="auto">
           <a:xfrm>
             <a:off x="4559808" y="9354314"/>
             <a:ext cx="4291584" cy="276999"/>
@@ -1195,13 +2177,16 @@
             </a:lvl1pPr>
           </a:lstStyle>
           <a:p>
-            <a:endParaRPr/>
-          </a:p>
-        </p:txBody>
-      </p:sp>
-      <p:sp>
-        <p:nvSpPr>
-          <p:cNvPr id="5" name="Holder 5"/>
+            <a:pPr>
+              <a:defRPr/>
+            </a:pPr>
+            <a:endParaRPr/>
+          </a:p>
+        </p:txBody>
+      </p:sp>
+      <p:sp>
+        <p:nvSpPr>
+          <p:cNvPr id="648789607" name="Holder 5"/>
           <p:cNvSpPr>
             <a:spLocks noGrp="1"/>
           </p:cNvSpPr>
@@ -1209,7 +2194,7 @@
             <p:ph type="dt" sz="half" idx="6"/>
           </p:nvPr>
         </p:nvSpPr>
-        <p:spPr>
+        <p:spPr bwMode="auto">
           <a:xfrm>
             <a:off x="670560" y="9354314"/>
             <a:ext cx="3084576" cy="276999"/>
@@ -1234,6 +2219,9 @@
             </a:lvl1pPr>
           </a:lstStyle>
           <a:p>
+            <a:pPr>
+              <a:defRPr/>
+            </a:pPr>
             <a:fld id="{1D8BD707-D9CF-40AE-B4C6-C98DA3205C09}" type="datetimeFigureOut">
               <a:rPr lang="en-US"/>
               <a:t>12/30/2025</a:t>
@@ -1244,7 +2232,7 @@
       </p:sp>
       <p:sp>
         <p:nvSpPr>
-          <p:cNvPr id="6" name="Holder 6"/>
+          <p:cNvPr id="1186910180" name="Holder 6"/>
           <p:cNvSpPr>
             <a:spLocks noGrp="1"/>
           </p:cNvSpPr>
@@ -1252,7 +2240,7 @@
             <p:ph type="sldNum" sz="quarter" idx="7"/>
           </p:nvPr>
         </p:nvSpPr>
-        <p:spPr>
+        <p:spPr bwMode="auto">
           <a:xfrm>
             <a:off x="9656064" y="9354314"/>
             <a:ext cx="3084576" cy="276999"/>
@@ -1277,7 +2265,11 @@
             </a:lvl1pPr>
           </a:lstStyle>
           <a:p>
+            <a:pPr>
+              <a:defRPr/>
+            </a:pPr>
             <a:fld id="{B6F15528-21DE-4FAA-801E-634DDDAF4B2B}" type="slidenum">
+              <a:rPr/>
               <a:t>‹#›</a:t>
             </a:fld>
             <a:endParaRPr/>
@@ -1288,11 +2280,11 @@
   </p:cSld>
   <p:clrMap bg1="lt1" tx1="dk1" bg2="lt2" tx2="dk2" accent1="accent1" accent2="accent2" accent3="accent3" accent4="accent4" accent5="accent5" accent6="accent6" hlink="hlink" folHlink="folHlink"/>
   <p:sldLayoutIdLst>
-    <p:sldLayoutId id="2147483661" r:id="rId1"/>
-    <p:sldLayoutId id="2147483662" r:id="rId2"/>
-    <p:sldLayoutId id="2147483663" r:id="rId3"/>
-    <p:sldLayoutId id="2147483664" r:id="rId4"/>
-    <p:sldLayoutId id="2147483665" r:id="rId5"/>
+    <p:sldLayoutId id="2147483649" r:id="rId1"/>
+    <p:sldLayoutId id="2147483650" r:id="rId2"/>
+    <p:sldLayoutId id="2147483651" r:id="rId3"/>
+    <p:sldLayoutId id="2147483652" r:id="rId4"/>
+    <p:sldLayoutId id="2147483653" r:id="rId5"/>
   </p:sldLayoutIdLst>
   <p:txStyles>
     <p:titleStyle>
@@ -1340,7 +2332,7 @@
           <a:cs typeface="+mn-cs"/>
         </a:defRPr>
       </a:lvl5pPr>
-      <a:lvl6pPr marL="3944207">
+      <a:lvl6pPr marL="3944206">
         <a:defRPr>
           <a:latin typeface="+mn-lt"/>
           <a:ea typeface="+mn-ea"/>
@@ -1405,7 +2397,7 @@
           <a:cs typeface="+mn-cs"/>
         </a:defRPr>
       </a:lvl5pPr>
-      <a:lvl6pPr marL="3944207">
+      <a:lvl6pPr marL="3944206">
         <a:defRPr>
           <a:latin typeface="+mn-lt"/>
           <a:ea typeface="+mn-ea"/>
@@ -1439,21 +2431,15 @@
 </file>
 
 <file path=ppt/slides/slide1.xml><?xml version="1.0" encoding="utf-8"?>
-<p:sld xmlns:a="http://schemas.openxmlformats.org/drawingml/2006/main" xmlns:r="http://schemas.openxmlformats.org/officeDocument/2006/relationships" xmlns:p="http://schemas.openxmlformats.org/presentationml/2006/main">
-  <p:cSld>
+<p:sld xmlns:a="http://schemas.openxmlformats.org/drawingml/2006/main" xmlns:r="http://schemas.openxmlformats.org/officeDocument/2006/relationships" xmlns:p="http://schemas.openxmlformats.org/presentationml/2006/main" xmlns:m="http://schemas.openxmlformats.org/officeDocument/2006/math" xmlns:w="http://schemas.openxmlformats.org/wordprocessingml/2006/main" xmlns:mc="http://schemas.openxmlformats.org/markup-compatibility/2006" showMasterPhAnim="0" showMasterSp="1" show="1">
+  <p:cSld name="">
     <p:spTree>
       <p:nvGrpSpPr>
-        <p:cNvPr id="1" name="">
-          <a:extLst>
-            <a:ext uri="{FF2B5EF4-FFF2-40B4-BE49-F238E27FC236}">
-              <a16:creationId xmlns:a16="http://schemas.microsoft.com/office/drawing/2014/main" id="{D458EB70-F102-BAB5-31FD-19FC3742A4BC}"/>
-            </a:ext>
-          </a:extLst>
-        </p:cNvPr>
+        <p:cNvPr id="1" name=""/>
         <p:cNvGrpSpPr/>
         <p:nvPr/>
       </p:nvGrpSpPr>
-      <p:grpSpPr>
+      <p:grpSpPr bwMode="auto">
         <a:xfrm>
           <a:off x="0" y="0"/>
           <a:ext cx="0" cy="0"/>
@@ -1463,13 +2449,7 @@
       </p:grpSpPr>
       <p:sp>
         <p:nvSpPr>
-          <p:cNvPr id="46" name="object 46">
-            <a:extLst>
-              <a:ext uri="{FF2B5EF4-FFF2-40B4-BE49-F238E27FC236}">
-                <a16:creationId xmlns:a16="http://schemas.microsoft.com/office/drawing/2014/main" id="{1FBE4D91-85C7-0256-4A79-65056ECD04F4}"/>
-              </a:ext>
-            </a:extLst>
-          </p:cNvPr>
+          <p:cNvPr id="1439116437" name="object 46"/>
           <p:cNvSpPr txBox="1">
             <a:spLocks noGrp="1"/>
           </p:cNvSpPr>
@@ -1477,7 +2457,7 @@
             <p:ph type="sldNum" sz="quarter" idx="7"/>
           </p:nvPr>
         </p:nvSpPr>
-        <p:spPr>
+        <p:spPr bwMode="auto">
           <a:xfrm>
             <a:off x="22501110" y="12821186"/>
             <a:ext cx="518023" cy="294953"/>
@@ -1496,44 +2476,28 @@
               <a:lnSpc>
                 <a:spcPts val="2260"/>
               </a:lnSpc>
+              <a:defRPr/>
             </a:pPr>
             <a:fld id="{81D60167-4931-47E6-BA6A-407CBD079E47}" type="slidenum">
-              <a:rPr spc="-86" dirty="0"/>
-              <a:pPr marL="65742">
-                <a:lnSpc>
-                  <a:spcPts val="2260"/>
-                </a:lnSpc>
-              </a:pPr>
+              <a:rPr spc="-86"/>
               <a:t>1</a:t>
             </a:fld>
-            <a:endParaRPr spc="-86" dirty="0"/>
+            <a:endParaRPr spc="-86"/>
           </a:p>
         </p:txBody>
       </p:sp>
       <p:pic>
         <p:nvPicPr>
-          <p:cNvPr id="47" name="object 25">
-            <a:extLst>
-              <a:ext uri="{FF2B5EF4-FFF2-40B4-BE49-F238E27FC236}">
-                <a16:creationId xmlns:a16="http://schemas.microsoft.com/office/drawing/2014/main" id="{98B72FCF-C42A-5F3E-FCAD-5FE306171E0D}"/>
-              </a:ext>
-            </a:extLst>
-          </p:cNvPr>
+          <p:cNvPr id="1412846099" name="object 25"/>
           <p:cNvPicPr/>
           <p:nvPr/>
         </p:nvPicPr>
-        <p:blipFill>
-          <a:blip r:embed="rId2">
-            <a:extLst>
-              <a:ext uri="{28A0092B-C50C-407E-A947-70E740481C1C}">
-                <a14:useLocalDpi xmlns:a14="http://schemas.microsoft.com/office/drawing/2010/main" val="0"/>
-              </a:ext>
-            </a:extLst>
-          </a:blip>
-          <a:srcRect t="17" b="17"/>
+        <p:blipFill rotWithShape="1">
+          <a:blip r:embed="rId3"/>
+          <a:srcRect l="0" t="17" r="0" b="16"/>
           <a:stretch/>
         </p:blipFill>
-        <p:spPr>
+        <p:spPr bwMode="auto">
           <a:xfrm>
             <a:off x="1" y="457200"/>
             <a:ext cx="13411199" cy="9021482"/>
@@ -1545,17 +2509,11 @@
       </p:pic>
       <p:sp>
         <p:nvSpPr>
-          <p:cNvPr id="3" name="object 30">
-            <a:extLst>
-              <a:ext uri="{FF2B5EF4-FFF2-40B4-BE49-F238E27FC236}">
-                <a16:creationId xmlns:a16="http://schemas.microsoft.com/office/drawing/2014/main" id="{B85DEC78-C825-AA3F-520D-C936B7F83D23}"/>
-              </a:ext>
-            </a:extLst>
-          </p:cNvPr>
+          <p:cNvPr id="19345122" name="object 30"/>
           <p:cNvSpPr txBox="1"/>
           <p:nvPr/>
         </p:nvSpPr>
-        <p:spPr>
+        <p:spPr bwMode="auto">
           <a:xfrm>
             <a:off x="0" y="3402211"/>
             <a:ext cx="12725400" cy="2769989"/>
@@ -1577,9 +2535,10 @@
               <a:spcBef>
                 <a:spcPts val="505"/>
               </a:spcBef>
-            </a:pPr>
-            <a:r>
-              <a:rPr lang="en-GB" sz="6000" b="1" dirty="0">
+              <a:defRPr/>
+            </a:pPr>
+            <a:r>
+              <a:rPr lang="en-GB" sz="6000" b="1">
                 <a:solidFill>
                   <a:srgbClr val="FFCE53"/>
                 </a:solidFill>
@@ -1587,32 +2546,36 @@
               </a:rPr>
               <a:t>The importance of programming and the importance of learning it</a:t>
             </a:r>
+            <a:endParaRPr/>
           </a:p>
         </p:txBody>
       </p:sp>
     </p:spTree>
-    <p:extLst>
-      <p:ext uri="{BB962C8B-B14F-4D97-AF65-F5344CB8AC3E}">
-        <p14:creationId xmlns:p14="http://schemas.microsoft.com/office/powerpoint/2010/main" val="3694772531"/>
-      </p:ext>
-    </p:extLst>
   </p:cSld>
   <p:clrMapOvr>
     <a:masterClrMapping/>
   </p:clrMapOvr>
+  <mc:AlternateContent xmlns:mc="http://schemas.openxmlformats.org/markup-compatibility/2006">
+    <mc:Choice xmlns:p159="http://schemas.microsoft.com/office/powerpoint/2015/09/main" xmlns:p14="http://schemas.microsoft.com/office/powerpoint/2010/main" Requires="p159">
+      <p:transition p14:dur="500" advClick="1"/>
+    </mc:Choice>
+    <mc:Fallback>
+      <p:transition advClick="1"/>
+    </mc:Fallback>
+  </mc:AlternateContent>
 </p:sld>
 </file>
 
 <file path=ppt/slides/slide2.xml><?xml version="1.0" encoding="utf-8"?>
-<p:sld xmlns:a="http://schemas.openxmlformats.org/drawingml/2006/main" xmlns:r="http://schemas.openxmlformats.org/officeDocument/2006/relationships" xmlns:p="http://schemas.openxmlformats.org/presentationml/2006/main" showMasterSp="0">
-  <p:cSld>
+<p:sld xmlns:a="http://schemas.openxmlformats.org/drawingml/2006/main" xmlns:r="http://schemas.openxmlformats.org/officeDocument/2006/relationships" xmlns:p="http://schemas.openxmlformats.org/presentationml/2006/main" xmlns:m="http://schemas.openxmlformats.org/officeDocument/2006/math" xmlns:w="http://schemas.openxmlformats.org/wordprocessingml/2006/main" xmlns:mc="http://schemas.openxmlformats.org/markup-compatibility/2006" showMasterPhAnim="0" showMasterSp="0" show="1">
+  <p:cSld name="">
     <p:spTree>
       <p:nvGrpSpPr>
         <p:cNvPr id="1" name=""/>
         <p:cNvGrpSpPr/>
         <p:nvPr/>
       </p:nvGrpSpPr>
-      <p:grpSpPr>
+      <p:grpSpPr bwMode="auto">
         <a:xfrm>
           <a:off x="0" y="0"/>
           <a:ext cx="0" cy="0"/>
@@ -1622,11 +2585,11 @@
       </p:grpSpPr>
       <p:grpSp>
         <p:nvGrpSpPr>
-          <p:cNvPr id="2" name="object 2"/>
+          <p:cNvPr id="1286405296" name="object 2"/>
           <p:cNvGrpSpPr/>
           <p:nvPr/>
         </p:nvGrpSpPr>
-        <p:grpSpPr>
+        <p:grpSpPr bwMode="auto">
           <a:xfrm>
             <a:off x="-10957" y="645359"/>
             <a:ext cx="13422157" cy="8767682"/>
@@ -1640,13 +2603,11 @@
             <p:cNvPicPr/>
             <p:nvPr/>
           </p:nvPicPr>
-          <p:blipFill>
-            <a:blip r:embed="rId2" cstate="print"/>
-            <a:stretch>
-              <a:fillRect/>
-            </a:stretch>
+          <p:blipFill rotWithShape="1">
+            <a:blip r:embed="rId3"/>
+            <a:stretch/>
           </p:blipFill>
-          <p:spPr>
+          <p:spPr bwMode="auto">
             <a:xfrm>
               <a:off x="0" y="2209800"/>
               <a:ext cx="7772399" cy="5081016"/>
@@ -1662,10 +2623,10 @@
             <p:cNvSpPr/>
             <p:nvPr/>
           </p:nvSpPr>
-          <p:spPr>
+          <p:spPr bwMode="auto">
             <a:xfrm>
               <a:off x="60960" y="3901439"/>
-              <a:ext cx="7711440" cy="1264920"/>
+              <a:ext cx="7711440" cy="1264919"/>
             </a:xfrm>
             <a:custGeom>
               <a:avLst/>
@@ -1674,7 +2635,7 @@
               <a:cxnLst/>
               <a:rect l="l" t="t" r="r" b="b"/>
               <a:pathLst>
-                <a:path w="7711440" h="1264920">
+                <a:path w="7711440" h="1264920" fill="norm" stroke="1" extrusionOk="0">
                   <a:moveTo>
                     <a:pt x="0" y="1264919"/>
                   </a:moveTo>
@@ -1694,6 +2655,7 @@
                 </a:path>
               </a:pathLst>
             </a:custGeom>
+            <a:grpFill/>
             <a:ln w="12192">
               <a:solidFill>
                 <a:srgbClr val="000000"/>
@@ -1704,6 +2666,9 @@
             <a:bodyPr wrap="square" lIns="0" tIns="0" rIns="0" bIns="0" rtlCol="0"/>
             <a:lstStyle/>
             <a:p>
+              <a:pPr>
+                <a:defRPr/>
+              </a:pPr>
               <a:endParaRPr/>
             </a:p>
           </p:txBody>
@@ -1711,11 +2676,11 @@
       </p:grpSp>
       <p:sp>
         <p:nvSpPr>
-          <p:cNvPr id="8" name="object 8"/>
+          <p:cNvPr id="1511156171" name="object 8"/>
           <p:cNvSpPr txBox="1"/>
           <p:nvPr/>
         </p:nvSpPr>
-        <p:spPr>
+        <p:spPr bwMode="auto">
           <a:xfrm>
             <a:off x="13091697" y="12746337"/>
             <a:ext cx="182980" cy="352972"/>
@@ -1732,17 +2697,18 @@
           <a:p>
             <a:pPr marL="21914">
               <a:spcBef>
-                <a:spcPts val="164"/>
+                <a:spcPts val="163"/>
               </a:spcBef>
-            </a:pPr>
-            <a:r>
-              <a:rPr sz="2157" spc="-86" dirty="0">
+              <a:defRPr/>
+            </a:pPr>
+            <a:r>
+              <a:rPr sz="2150" spc="-86">
                 <a:latin typeface="Calibri"/>
                 <a:cs typeface="Calibri"/>
               </a:rPr>
               <a:t>2</a:t>
             </a:r>
-            <a:endParaRPr sz="2157">
+            <a:endParaRPr sz="2150">
               <a:latin typeface="Calibri"/>
               <a:cs typeface="Calibri"/>
             </a:endParaRPr>
@@ -1751,17 +2717,11 @@
       </p:sp>
       <p:sp>
         <p:nvSpPr>
-          <p:cNvPr id="9" name="object 30">
-            <a:extLst>
-              <a:ext uri="{FF2B5EF4-FFF2-40B4-BE49-F238E27FC236}">
-                <a16:creationId xmlns:a16="http://schemas.microsoft.com/office/drawing/2014/main" id="{3AA9CB0E-53FA-ACBF-E593-FD91CDBB5BFF}"/>
-              </a:ext>
-            </a:extLst>
-          </p:cNvPr>
+          <p:cNvPr id="127633123" name="object 30"/>
           <p:cNvSpPr txBox="1"/>
           <p:nvPr/>
         </p:nvSpPr>
-        <p:spPr>
+        <p:spPr bwMode="auto">
           <a:xfrm>
             <a:off x="106432" y="3810174"/>
             <a:ext cx="13304768" cy="1295226"/>
@@ -1783,9 +2743,10 @@
               <a:spcBef>
                 <a:spcPts val="505"/>
               </a:spcBef>
-            </a:pPr>
-            <a:r>
-              <a:rPr lang="en-GB" sz="4000" b="1" dirty="0">
+              <a:defRPr/>
+            </a:pPr>
+            <a:r>
+              <a:rPr lang="en-GB" sz="4000" b="1">
                 <a:solidFill>
                   <a:srgbClr val="FFCE53"/>
                 </a:solidFill>
@@ -1794,15 +2755,17 @@
               </a:rPr>
               <a:t>The importance of programming </a:t>
             </a:r>
+            <a:endParaRPr/>
           </a:p>
           <a:p>
             <a:pPr marL="2089760" algn="ctr">
               <a:spcBef>
                 <a:spcPts val="505"/>
               </a:spcBef>
-            </a:pPr>
-            <a:r>
-              <a:rPr lang="en-GB" sz="4000" b="1" dirty="0">
+              <a:defRPr/>
+            </a:pPr>
+            <a:r>
+              <a:rPr lang="en-GB" sz="4000" b="1">
                 <a:solidFill>
                   <a:srgbClr val="FFCE53"/>
                 </a:solidFill>
@@ -1811,6 +2774,7 @@
               </a:rPr>
               <a:t>and the importance of learning it</a:t>
             </a:r>
+            <a:endParaRPr/>
           </a:p>
         </p:txBody>
       </p:sp>
@@ -1819,25 +2783,27 @@
   <p:clrMapOvr>
     <a:masterClrMapping/>
   </p:clrMapOvr>
+  <mc:AlternateContent xmlns:mc="http://schemas.openxmlformats.org/markup-compatibility/2006">
+    <mc:Choice xmlns:p159="http://schemas.microsoft.com/office/powerpoint/2015/09/main" xmlns:p14="http://schemas.microsoft.com/office/powerpoint/2010/main" Requires="p159">
+      <p:transition p14:dur="500" advClick="1"/>
+    </mc:Choice>
+    <mc:Fallback>
+      <p:transition advClick="1"/>
+    </mc:Fallback>
+  </mc:AlternateContent>
 </p:sld>
 </file>
 
 <file path=ppt/slides/slide3.xml><?xml version="1.0" encoding="utf-8"?>
-<p:sld xmlns:a="http://schemas.openxmlformats.org/drawingml/2006/main" xmlns:r="http://schemas.openxmlformats.org/officeDocument/2006/relationships" xmlns:p="http://schemas.openxmlformats.org/presentationml/2006/main" showMasterSp="0">
-  <p:cSld>
+<p:sld xmlns:a="http://schemas.openxmlformats.org/drawingml/2006/main" xmlns:r="http://schemas.openxmlformats.org/officeDocument/2006/relationships" xmlns:p="http://schemas.openxmlformats.org/presentationml/2006/main" xmlns:m="http://schemas.openxmlformats.org/officeDocument/2006/math" xmlns:w="http://schemas.openxmlformats.org/wordprocessingml/2006/main" xmlns:mc="http://schemas.openxmlformats.org/markup-compatibility/2006" showMasterPhAnim="0" showMasterSp="0" show="1">
+  <p:cSld name="">
     <p:spTree>
       <p:nvGrpSpPr>
-        <p:cNvPr id="1" name="">
-          <a:extLst>
-            <a:ext uri="{FF2B5EF4-FFF2-40B4-BE49-F238E27FC236}">
-              <a16:creationId xmlns:a16="http://schemas.microsoft.com/office/drawing/2014/main" id="{03266C84-96DF-4E4E-6F8B-91A05446CAA5}"/>
-            </a:ext>
-          </a:extLst>
-        </p:cNvPr>
+        <p:cNvPr id="1" name=""/>
         <p:cNvGrpSpPr/>
         <p:nvPr/>
       </p:nvGrpSpPr>
-      <p:grpSpPr>
+      <p:grpSpPr bwMode="auto">
         <a:xfrm>
           <a:off x="0" y="0"/>
           <a:ext cx="0" cy="0"/>
@@ -1847,17 +2813,11 @@
       </p:grpSpPr>
       <p:sp>
         <p:nvSpPr>
-          <p:cNvPr id="3" name="object 3">
-            <a:extLst>
-              <a:ext uri="{FF2B5EF4-FFF2-40B4-BE49-F238E27FC236}">
-                <a16:creationId xmlns:a16="http://schemas.microsoft.com/office/drawing/2014/main" id="{DFC5D9C1-B6BF-65E1-D3D6-95868F3F585A}"/>
-              </a:ext>
-            </a:extLst>
-          </p:cNvPr>
+          <p:cNvPr id="1323619925" name="object 3"/>
           <p:cNvSpPr txBox="1"/>
           <p:nvPr/>
         </p:nvSpPr>
-        <p:spPr>
+        <p:spPr bwMode="auto">
           <a:xfrm>
             <a:off x="381000" y="888075"/>
             <a:ext cx="12352767" cy="6557753"/>
@@ -1872,149 +2832,185 @@
           </a:bodyPr>
           <a:lstStyle/>
           <a:p>
-            <a:r>
-              <a:rPr lang="en-GB" sz="4000" b="1" dirty="0">
-                <a:latin typeface="Comic Sans MS" panose="030F0702030302020204" pitchFamily="66" charset="0"/>
+            <a:pPr>
+              <a:defRPr/>
+            </a:pPr>
+            <a:r>
+              <a:rPr lang="en-GB" sz="4000" b="1">
+                <a:latin typeface="Comic Sans MS"/>
               </a:rPr>
               <a:t>The importance of programming and the importance of learning it</a:t>
             </a:r>
-          </a:p>
-          <a:p>
-            <a:endParaRPr lang="en-GB" sz="2400" b="1" spc="-17" dirty="0">
+            <a:endParaRPr/>
+          </a:p>
+          <a:p>
+            <a:pPr>
+              <a:defRPr/>
+            </a:pPr>
+            <a:endParaRPr lang="en-GB" sz="2400" b="1" spc="-17">
               <a:solidFill>
                 <a:schemeClr val="tx1"/>
               </a:solidFill>
-              <a:latin typeface="Comic Sans MS" panose="030F0702030302020204" pitchFamily="66" charset="0"/>
+              <a:latin typeface="Comic Sans MS"/>
               <a:cs typeface="Comic Sans MS"/>
             </a:endParaRPr>
           </a:p>
           <a:p>
-            <a:r>
-              <a:rPr lang="en-GB" sz="2400" spc="-17" dirty="0">
+            <a:pPr>
+              <a:defRPr/>
+            </a:pPr>
+            <a:r>
+              <a:rPr lang="en-GB" sz="2400" spc="-17">
                 <a:solidFill>
                   <a:schemeClr val="tx1"/>
                 </a:solidFill>
-                <a:latin typeface="Comic Sans MS" panose="030F0702030302020204" pitchFamily="66" charset="0"/>
+                <a:latin typeface="Comic Sans MS"/>
                 <a:cs typeface="Comic Sans MS"/>
               </a:rPr>
               <a:t>1️⃣ The Importance of Learning Programming the Right Way</a:t>
             </a:r>
-          </a:p>
-          <a:p>
-            <a:r>
-              <a:rPr lang="en-GB" sz="2400" spc="-17" dirty="0">
+            <a:endParaRPr/>
+          </a:p>
+          <a:p>
+            <a:pPr>
+              <a:defRPr/>
+            </a:pPr>
+            <a:r>
+              <a:rPr lang="en-GB" sz="2400" spc="-17">
                 <a:solidFill>
                   <a:schemeClr val="tx1"/>
                 </a:solidFill>
-                <a:latin typeface="Comic Sans MS" panose="030F0702030302020204" pitchFamily="66" charset="0"/>
+                <a:latin typeface="Comic Sans MS"/>
                 <a:cs typeface="Comic Sans MS"/>
               </a:rPr>
               <a:t>	🟩 Main Concept: Programming is one of the highest-paying professions and 			requires proper study and progression.</a:t>
             </a:r>
-          </a:p>
-          <a:p>
-            <a:r>
-              <a:rPr lang="en-GB" sz="2400" spc="-17" dirty="0">
+            <a:endParaRPr/>
+          </a:p>
+          <a:p>
+            <a:pPr>
+              <a:defRPr/>
+            </a:pPr>
+            <a:r>
+              <a:rPr lang="en-GB" sz="2400" spc="-17">
                 <a:solidFill>
                   <a:schemeClr val="tx1"/>
                 </a:solidFill>
-                <a:latin typeface="Comic Sans MS" panose="030F0702030302020204" pitchFamily="66" charset="0"/>
+                <a:latin typeface="Comic Sans MS"/>
                 <a:cs typeface="Comic Sans MS"/>
               </a:rPr>
               <a:t>	🟩 Key point: You can't expect to reach a professional level in just a few months.</a:t>
             </a:r>
-          </a:p>
-          <a:p>
-            <a:r>
-              <a:rPr lang="en-GB" sz="2400" spc="-17" dirty="0">
+            <a:endParaRPr/>
+          </a:p>
+          <a:p>
+            <a:pPr>
+              <a:defRPr/>
+            </a:pPr>
+            <a:r>
+              <a:rPr lang="en-GB" sz="2400" spc="-17">
                 <a:solidFill>
                   <a:schemeClr val="tx1"/>
                 </a:solidFill>
-                <a:latin typeface="Comic Sans MS" panose="030F0702030302020204" pitchFamily="66" charset="0"/>
+                <a:latin typeface="Comic Sans MS"/>
                 <a:cs typeface="Comic Sans MS"/>
               </a:rPr>
               <a:t>	💡 Example : A doctor studies for nine years to earn a high salary, and the same 	goes for engineers and lawyers.</a:t>
             </a:r>
-          </a:p>
-          <a:p>
-            <a:r>
-              <a:rPr lang="en-GB" sz="2400" spc="-17" dirty="0">
+            <a:endParaRPr/>
+          </a:p>
+          <a:p>
+            <a:pPr>
+              <a:defRPr/>
+            </a:pPr>
+            <a:r>
+              <a:rPr lang="en-GB" sz="2400" spc="-17">
                 <a:solidFill>
                   <a:schemeClr val="tx1"/>
                 </a:solidFill>
-                <a:latin typeface="Comic Sans MS" panose="030F0702030302020204" pitchFamily="66" charset="0"/>
+                <a:latin typeface="Comic Sans MS"/>
                 <a:cs typeface="Comic Sans MS"/>
               </a:rPr>
               <a:t>2️⃣ Why People Fail to Learn Programming</a:t>
             </a:r>
-          </a:p>
-          <a:p>
-            <a:r>
-              <a:rPr lang="en-GB" sz="2400" spc="-17" dirty="0">
+            <a:endParaRPr/>
+          </a:p>
+          <a:p>
+            <a:pPr>
+              <a:defRPr/>
+            </a:pPr>
+            <a:r>
+              <a:rPr lang="en-GB" sz="2400" spc="-17">
                 <a:solidFill>
                   <a:schemeClr val="tx1"/>
                 </a:solidFill>
-                <a:latin typeface="Comic Sans MS" panose="030F0702030302020204" pitchFamily="66" charset="0"/>
+                <a:latin typeface="Comic Sans MS"/>
                 <a:cs typeface="Comic Sans MS"/>
               </a:rPr>
               <a:t>	🟩 Main Concept: Lack of a Progressive and Interconnected Programming 			Learning Methodology</a:t>
             </a:r>
-          </a:p>
-          <a:p>
-            <a:r>
-              <a:rPr lang="en-GB" sz="2400" spc="-17" dirty="0">
+            <a:endParaRPr/>
+          </a:p>
+          <a:p>
+            <a:pPr>
+              <a:defRPr/>
+            </a:pPr>
+            <a:r>
+              <a:rPr lang="en-GB" sz="2400" spc="-17">
                 <a:solidFill>
                   <a:schemeClr val="tx1"/>
                 </a:solidFill>
-                <a:latin typeface="Comic Sans MS" panose="030F0702030302020204" pitchFamily="66" charset="0"/>
+                <a:latin typeface="Comic Sans MS"/>
                 <a:cs typeface="Comic Sans MS"/>
               </a:rPr>
               <a:t>	🟩 Key Point: Most courses focus on a specific language or single skill without 			building a foundation.</a:t>
             </a:r>
-          </a:p>
-          <a:p>
-            <a:r>
-              <a:rPr lang="en-GB" sz="2400" spc="-17" dirty="0">
+            <a:endParaRPr/>
+          </a:p>
+          <a:p>
+            <a:pPr>
+              <a:defRPr/>
+            </a:pPr>
+            <a:r>
+              <a:rPr lang="en-GB" sz="2400" spc="-17">
                 <a:solidFill>
                   <a:schemeClr val="tx1"/>
                 </a:solidFill>
-                <a:latin typeface="Comic Sans MS" panose="030F0702030302020204" pitchFamily="66" charset="0"/>
+                <a:latin typeface="Comic Sans MS"/>
                 <a:cs typeface="Comic Sans MS"/>
               </a:rPr>
               <a:t>	💡 Example : : A student starts programming directly with advanced techniques 		and skips the basics, becoming a limited programmer.</a:t>
             </a:r>
+            <a:endParaRPr/>
           </a:p>
         </p:txBody>
       </p:sp>
     </p:spTree>
-    <p:extLst>
-      <p:ext uri="{BB962C8B-B14F-4D97-AF65-F5344CB8AC3E}">
-        <p14:creationId xmlns:p14="http://schemas.microsoft.com/office/powerpoint/2010/main" val="4046665075"/>
-      </p:ext>
-    </p:extLst>
   </p:cSld>
   <p:clrMapOvr>
     <a:masterClrMapping/>
   </p:clrMapOvr>
+  <mc:AlternateContent xmlns:mc="http://schemas.openxmlformats.org/markup-compatibility/2006">
+    <mc:Choice xmlns:p159="http://schemas.microsoft.com/office/powerpoint/2015/09/main" xmlns:p14="http://schemas.microsoft.com/office/powerpoint/2010/main" Requires="p159">
+      <p:transition p14:dur="500" advClick="1"/>
+    </mc:Choice>
+    <mc:Fallback>
+      <p:transition advClick="1"/>
+    </mc:Fallback>
+  </mc:AlternateContent>
 </p:sld>
 </file>
 
 <file path=ppt/slides/slide4.xml><?xml version="1.0" encoding="utf-8"?>
-<p:sld xmlns:a="http://schemas.openxmlformats.org/drawingml/2006/main" xmlns:r="http://schemas.openxmlformats.org/officeDocument/2006/relationships" xmlns:p="http://schemas.openxmlformats.org/presentationml/2006/main" showMasterSp="0">
-  <p:cSld>
+<p:sld xmlns:a="http://schemas.openxmlformats.org/drawingml/2006/main" xmlns:r="http://schemas.openxmlformats.org/officeDocument/2006/relationships" xmlns:p="http://schemas.openxmlformats.org/presentationml/2006/main" xmlns:m="http://schemas.openxmlformats.org/officeDocument/2006/math" xmlns:w="http://schemas.openxmlformats.org/wordprocessingml/2006/main" xmlns:mc="http://schemas.openxmlformats.org/markup-compatibility/2006" showMasterPhAnim="0" showMasterSp="0" show="1">
+  <p:cSld name="">
     <p:spTree>
       <p:nvGrpSpPr>
-        <p:cNvPr id="1" name="">
-          <a:extLst>
-            <a:ext uri="{FF2B5EF4-FFF2-40B4-BE49-F238E27FC236}">
-              <a16:creationId xmlns:a16="http://schemas.microsoft.com/office/drawing/2014/main" id="{68334D91-D606-E7DE-7A5D-DA629F39921C}"/>
-            </a:ext>
-          </a:extLst>
-        </p:cNvPr>
+        <p:cNvPr id="1" name=""/>
         <p:cNvGrpSpPr/>
         <p:nvPr/>
       </p:nvGrpSpPr>
-      <p:grpSpPr>
+      <p:grpSpPr bwMode="auto">
         <a:xfrm>
           <a:off x="0" y="0"/>
           <a:ext cx="0" cy="0"/>
@@ -2024,17 +3020,11 @@
       </p:grpSpPr>
       <p:sp>
         <p:nvSpPr>
-          <p:cNvPr id="3" name="object 3">
-            <a:extLst>
-              <a:ext uri="{FF2B5EF4-FFF2-40B4-BE49-F238E27FC236}">
-                <a16:creationId xmlns:a16="http://schemas.microsoft.com/office/drawing/2014/main" id="{F84FC38A-9693-E28B-501B-9EA2937EBD10}"/>
-              </a:ext>
-            </a:extLst>
-          </p:cNvPr>
+          <p:cNvPr id="991514083" name="object 3"/>
           <p:cNvSpPr txBox="1"/>
           <p:nvPr/>
         </p:nvSpPr>
-        <p:spPr>
+        <p:spPr bwMode="auto">
           <a:xfrm>
             <a:off x="381000" y="888075"/>
             <a:ext cx="12352767" cy="9019966"/>
@@ -2049,240 +3039,305 @@
           </a:bodyPr>
           <a:lstStyle/>
           <a:p>
-            <a:r>
-              <a:rPr lang="en-GB" sz="2400" spc="-17" dirty="0">
+            <a:pPr>
+              <a:defRPr/>
+            </a:pPr>
+            <a:r>
+              <a:rPr lang="en-GB" sz="2400" spc="-17">
                 <a:solidFill>
                   <a:schemeClr val="tx1"/>
                 </a:solidFill>
-                <a:latin typeface="Comic Sans MS" panose="030F0702030302020204" pitchFamily="66" charset="0"/>
+                <a:latin typeface="Comic Sans MS"/>
                 <a:cs typeface="Comic Sans MS"/>
               </a:rPr>
               <a:t>3️⃣ Foundations of Learning Programming</a:t>
             </a:r>
-          </a:p>
-          <a:p>
-            <a:r>
-              <a:rPr lang="en-GB" sz="2400" spc="-17" dirty="0">
+            <a:endParaRPr/>
+          </a:p>
+          <a:p>
+            <a:pPr>
+              <a:defRPr/>
+            </a:pPr>
+            <a:r>
+              <a:rPr lang="en-GB" sz="2400" spc="-17">
                 <a:solidFill>
                   <a:schemeClr val="tx1"/>
                 </a:solidFill>
-                <a:latin typeface="Comic Sans MS" panose="030F0702030302020204" pitchFamily="66" charset="0"/>
+                <a:latin typeface="Comic Sans MS"/>
                 <a:cs typeface="Comic Sans MS"/>
               </a:rPr>
               <a:t>	🟩 Definition: Any profession requires a solid foundation, and programming is no 		exception.</a:t>
             </a:r>
-          </a:p>
-          <a:p>
-            <a:r>
-              <a:rPr lang="en-GB" sz="2400" spc="-17" dirty="0">
+            <a:endParaRPr/>
+          </a:p>
+          <a:p>
+            <a:pPr>
+              <a:defRPr/>
+            </a:pPr>
+            <a:r>
+              <a:rPr lang="en-GB" sz="2400" spc="-17">
                 <a:solidFill>
                   <a:schemeClr val="tx1"/>
                 </a:solidFill>
-                <a:latin typeface="Comic Sans MS" panose="030F0702030302020204" pitchFamily="66" charset="0"/>
+                <a:latin typeface="Comic Sans MS"/>
                 <a:cs typeface="Comic Sans MS"/>
               </a:rPr>
               <a:t>	🟩 Main Concept: Learning programming requires time, effort, and a gradual 			approach.</a:t>
             </a:r>
-          </a:p>
-          <a:p>
-            <a:r>
-              <a:rPr lang="en-GB" sz="2400" spc="-17" dirty="0">
+            <a:endParaRPr/>
+          </a:p>
+          <a:p>
+            <a:pPr>
+              <a:defRPr/>
+            </a:pPr>
+            <a:r>
+              <a:rPr lang="en-GB" sz="2400" spc="-17">
                 <a:solidFill>
                   <a:schemeClr val="tx1"/>
                 </a:solidFill>
-                <a:latin typeface="Comic Sans MS" panose="030F0702030302020204" pitchFamily="66" charset="0"/>
+                <a:latin typeface="Comic Sans MS"/>
                 <a:cs typeface="Comic Sans MS"/>
               </a:rPr>
               <a:t>	🟩 Key Point: Focus on developing analytical and problem-solving skills before 			learning programming languages. </a:t>
             </a:r>
-          </a:p>
-          <a:p>
-            <a:r>
-              <a:rPr lang="en-GB" sz="2400" spc="-17" dirty="0">
+            <a:endParaRPr/>
+          </a:p>
+          <a:p>
+            <a:pPr>
+              <a:defRPr/>
+            </a:pPr>
+            <a:r>
+              <a:rPr lang="en-GB" sz="2400" spc="-17">
                 <a:solidFill>
                   <a:schemeClr val="tx1"/>
                 </a:solidFill>
-                <a:latin typeface="Comic Sans MS" panose="030F0702030302020204" pitchFamily="66" charset="0"/>
+                <a:latin typeface="Comic Sans MS"/>
                 <a:cs typeface="Comic Sans MS"/>
               </a:rPr>
               <a:t>	💡 Example : : Solve addition and subtraction problems on paper before moving 		on to differential and integral calculus.</a:t>
             </a:r>
-          </a:p>
-          <a:p>
-            <a:r>
-              <a:rPr lang="en-GB" sz="2400" spc="-17" dirty="0">
+            <a:endParaRPr/>
+          </a:p>
+          <a:p>
+            <a:pPr>
+              <a:defRPr/>
+            </a:pPr>
+            <a:r>
+              <a:rPr lang="en-GB" sz="2400" spc="-17">
                 <a:solidFill>
                   <a:schemeClr val="tx1"/>
                 </a:solidFill>
-                <a:latin typeface="Comic Sans MS" panose="030F0702030302020204" pitchFamily="66" charset="0"/>
+                <a:latin typeface="Comic Sans MS"/>
                 <a:cs typeface="Comic Sans MS"/>
               </a:rPr>
               <a:t>4️⃣ Roadmap for Learning Programming</a:t>
             </a:r>
-          </a:p>
-          <a:p>
-            <a:r>
-              <a:rPr lang="en-GB" sz="2400" spc="-17" dirty="0">
+            <a:endParaRPr/>
+          </a:p>
+          <a:p>
+            <a:pPr>
+              <a:defRPr/>
+            </a:pPr>
+            <a:r>
+              <a:rPr lang="en-GB" sz="2400" spc="-17">
                 <a:solidFill>
                   <a:schemeClr val="tx1"/>
                 </a:solidFill>
-                <a:latin typeface="Comic Sans MS" panose="030F0702030302020204" pitchFamily="66" charset="0"/>
+                <a:latin typeface="Comic Sans MS"/>
                 <a:cs typeface="Comic Sans MS"/>
               </a:rPr>
               <a:t>	🟩 Definition: A roadmap consists of progressive and interconnected courses, 		starting with the fundamentals and culminating in specialization.</a:t>
             </a:r>
-          </a:p>
-          <a:p>
-            <a:r>
-              <a:rPr lang="en-GB" sz="2400" spc="-17" dirty="0">
+            <a:endParaRPr/>
+          </a:p>
+          <a:p>
+            <a:pPr>
+              <a:defRPr/>
+            </a:pPr>
+            <a:r>
+              <a:rPr lang="en-GB" sz="2400" spc="-17">
                 <a:solidFill>
                   <a:schemeClr val="tx1"/>
                 </a:solidFill>
-                <a:latin typeface="Comic Sans MS" panose="030F0702030302020204" pitchFamily="66" charset="0"/>
+                <a:latin typeface="Comic Sans MS"/>
                 <a:cs typeface="Comic Sans MS"/>
               </a:rPr>
               <a:t>	🟩 Main Concept:</a:t>
             </a:r>
-          </a:p>
-          <a:p>
-            <a:r>
-              <a:rPr lang="en-GB" sz="2400" spc="-17" dirty="0">
+            <a:endParaRPr/>
+          </a:p>
+          <a:p>
+            <a:pPr>
+              <a:defRPr/>
+            </a:pPr>
+            <a:r>
+              <a:rPr lang="en-GB" sz="2400" spc="-17">
                 <a:solidFill>
                   <a:schemeClr val="tx1"/>
                 </a:solidFill>
-                <a:latin typeface="Comic Sans MS" panose="030F0702030302020204" pitchFamily="66" charset="0"/>
+                <a:latin typeface="Comic Sans MS"/>
                 <a:cs typeface="Comic Sans MS"/>
               </a:rPr>
               <a:t>	1️⃣ Blue Section: General Foundations of Programming	</a:t>
             </a:r>
-          </a:p>
-          <a:p>
-            <a:r>
-              <a:rPr lang="en-GB" sz="2400" spc="-17" dirty="0">
+            <a:endParaRPr/>
+          </a:p>
+          <a:p>
+            <a:pPr>
+              <a:defRPr/>
+            </a:pPr>
+            <a:r>
+              <a:rPr lang="en-GB" sz="2400" spc="-17">
                 <a:solidFill>
                   <a:schemeClr val="tx1"/>
                 </a:solidFill>
-                <a:latin typeface="Comic Sans MS" panose="030F0702030302020204" pitchFamily="66" charset="0"/>
+                <a:latin typeface="Comic Sans MS"/>
                 <a:cs typeface="Comic Sans MS"/>
               </a:rPr>
               <a:t>		🟨 Learning Computer Science from Scratch</a:t>
             </a:r>
-          </a:p>
-          <a:p>
-            <a:r>
-              <a:rPr lang="en-GB" sz="2400" spc="-17" dirty="0">
+            <a:endParaRPr/>
+          </a:p>
+          <a:p>
+            <a:pPr>
+              <a:defRPr/>
+            </a:pPr>
+            <a:r>
+              <a:rPr lang="en-GB" sz="2400" spc="-17">
                 <a:solidFill>
                   <a:schemeClr val="tx1"/>
                 </a:solidFill>
-                <a:latin typeface="Comic Sans MS" panose="030F0702030302020204" pitchFamily="66" charset="0"/>
+                <a:latin typeface="Comic Sans MS"/>
                 <a:cs typeface="Comic Sans MS"/>
               </a:rPr>
               <a:t>		🟨 Developing Analytical and Logical Thinking</a:t>
             </a:r>
-          </a:p>
-          <a:p>
-            <a:r>
-              <a:rPr lang="en-GB" sz="2400" spc="-17" dirty="0">
+            <a:endParaRPr/>
+          </a:p>
+          <a:p>
+            <a:pPr>
+              <a:defRPr/>
+            </a:pPr>
+            <a:r>
+              <a:rPr lang="en-GB" sz="2400" spc="-17">
                 <a:solidFill>
                   <a:schemeClr val="tx1"/>
                 </a:solidFill>
-                <a:latin typeface="Comic Sans MS" panose="030F0702030302020204" pitchFamily="66" charset="0"/>
+                <a:latin typeface="Comic Sans MS"/>
                 <a:cs typeface="Comic Sans MS"/>
               </a:rPr>
               <a:t>		🟨 Gradual Problem Solving (Divide and Conquer, LEGO Method)</a:t>
             </a:r>
-          </a:p>
-          <a:p>
-            <a:r>
-              <a:rPr lang="en-GB" sz="2400" spc="-17" dirty="0">
+            <a:endParaRPr/>
+          </a:p>
+          <a:p>
+            <a:pPr>
+              <a:defRPr/>
+            </a:pPr>
+            <a:r>
+              <a:rPr lang="en-GB" sz="2400" spc="-17">
                 <a:solidFill>
                   <a:schemeClr val="tx1"/>
                 </a:solidFill>
-                <a:latin typeface="Comic Sans MS" panose="030F0702030302020204" pitchFamily="66" charset="0"/>
+                <a:latin typeface="Comic Sans MS"/>
                 <a:cs typeface="Comic Sans MS"/>
               </a:rPr>
               <a:t>	 	🟨 Building Problem-Solving Skills Before Learning Languages</a:t>
             </a:r>
-          </a:p>
-          <a:p>
-            <a:r>
-              <a:rPr lang="en-GB" sz="2400" spc="-17" dirty="0">
+            <a:endParaRPr/>
+          </a:p>
+          <a:p>
+            <a:pPr>
+              <a:defRPr/>
+            </a:pPr>
+            <a:r>
+              <a:rPr lang="en-GB" sz="2400" spc="-17">
                 <a:solidFill>
                   <a:schemeClr val="tx1"/>
                 </a:solidFill>
-                <a:latin typeface="Comic Sans MS" panose="030F0702030302020204" pitchFamily="66" charset="0"/>
+                <a:latin typeface="Comic Sans MS"/>
                 <a:cs typeface="Comic Sans MS"/>
               </a:rPr>
               <a:t>	 2️⃣ Yellow Section: Beginning Specialization</a:t>
             </a:r>
-          </a:p>
-          <a:p>
-            <a:r>
-              <a:rPr lang="en-GB" sz="2400" spc="-17" dirty="0">
+            <a:endParaRPr/>
+          </a:p>
+          <a:p>
+            <a:pPr>
+              <a:defRPr/>
+            </a:pPr>
+            <a:r>
+              <a:rPr lang="en-GB" sz="2400" spc="-17">
                 <a:solidFill>
                   <a:schemeClr val="tx1"/>
                 </a:solidFill>
-                <a:latin typeface="Comic Sans MS" panose="030F0702030302020204" pitchFamily="66" charset="0"/>
+                <a:latin typeface="Comic Sans MS"/>
                 <a:cs typeface="Comic Sans MS"/>
               </a:rPr>
               <a:t>		🟨 Specializes in various fields such as web, mobile, or backend 					development.</a:t>
             </a:r>
-          </a:p>
-          <a:p>
-            <a:r>
-              <a:rPr lang="en-GB" sz="2400" spc="-17" dirty="0">
+            <a:endParaRPr/>
+          </a:p>
+          <a:p>
+            <a:pPr>
+              <a:defRPr/>
+            </a:pPr>
+            <a:r>
+              <a:rPr lang="en-GB" sz="2400" spc="-17">
                 <a:solidFill>
                   <a:schemeClr val="tx1"/>
                 </a:solidFill>
-                <a:latin typeface="Comic Sans MS" panose="030F0702030302020204" pitchFamily="66" charset="0"/>
+                <a:latin typeface="Comic Sans MS"/>
                 <a:cs typeface="Comic Sans MS"/>
               </a:rPr>
               <a:t>		🟨 Intersects with most other specializations.</a:t>
             </a:r>
-          </a:p>
-          <a:p>
-            <a:r>
-              <a:rPr lang="en-GB" sz="2400" spc="-17" dirty="0">
+            <a:endParaRPr/>
+          </a:p>
+          <a:p>
+            <a:pPr>
+              <a:defRPr/>
+            </a:pPr>
+            <a:r>
+              <a:rPr lang="en-GB" sz="2400" spc="-17">
                 <a:solidFill>
                   <a:schemeClr val="tx1"/>
                 </a:solidFill>
-                <a:latin typeface="Comic Sans MS" panose="030F0702030302020204" pitchFamily="66" charset="0"/>
+                <a:latin typeface="Comic Sans MS"/>
                 <a:cs typeface="Comic Sans MS"/>
               </a:rPr>
               <a:t>		💡 Example : After completing course 13, you can begin C# and database 			courses simultaneously.</a:t>
             </a:r>
+            <a:endParaRPr/>
           </a:p>
         </p:txBody>
       </p:sp>
     </p:spTree>
-    <p:extLst>
-      <p:ext uri="{BB962C8B-B14F-4D97-AF65-F5344CB8AC3E}">
-        <p14:creationId xmlns:p14="http://schemas.microsoft.com/office/powerpoint/2010/main" val="3269635825"/>
-      </p:ext>
-    </p:extLst>
   </p:cSld>
   <p:clrMapOvr>
     <a:masterClrMapping/>
   </p:clrMapOvr>
+  <mc:AlternateContent xmlns:mc="http://schemas.openxmlformats.org/markup-compatibility/2006">
+    <mc:Choice xmlns:p159="http://schemas.microsoft.com/office/powerpoint/2015/09/main" xmlns:p14="http://schemas.microsoft.com/office/powerpoint/2010/main" Requires="p159">
+      <p:transition p14:dur="500" advClick="1"/>
+    </mc:Choice>
+    <mc:Fallback>
+      <p:transition advClick="1"/>
+    </mc:Fallback>
+  </mc:AlternateContent>
 </p:sld>
 </file>
 
 <file path=ppt/slides/slide5.xml><?xml version="1.0" encoding="utf-8"?>
-<p:sld xmlns:a="http://schemas.openxmlformats.org/drawingml/2006/main" xmlns:r="http://schemas.openxmlformats.org/officeDocument/2006/relationships" xmlns:p="http://schemas.openxmlformats.org/presentationml/2006/main" showMasterSp="0">
-  <p:cSld>
+<p:sld xmlns:a="http://schemas.openxmlformats.org/drawingml/2006/main" xmlns:r="http://schemas.openxmlformats.org/officeDocument/2006/relationships" xmlns:p="http://schemas.openxmlformats.org/presentationml/2006/main" xmlns:m="http://schemas.openxmlformats.org/officeDocument/2006/math" xmlns:w="http://schemas.openxmlformats.org/wordprocessingml/2006/main" xmlns:mc="http://schemas.openxmlformats.org/markup-compatibility/2006" showMasterPhAnim="0" showMasterSp="0" show="1">
+  <p:cSld name="">
     <p:spTree>
       <p:nvGrpSpPr>
-        <p:cNvPr id="1" name="">
-          <a:extLst>
-            <a:ext uri="{FF2B5EF4-FFF2-40B4-BE49-F238E27FC236}">
-              <a16:creationId xmlns:a16="http://schemas.microsoft.com/office/drawing/2014/main" id="{9DD0199E-F430-922A-F2B7-088E3C41F845}"/>
-            </a:ext>
-          </a:extLst>
-        </p:cNvPr>
+        <p:cNvPr id="1" name=""/>
         <p:cNvGrpSpPr/>
         <p:nvPr/>
       </p:nvGrpSpPr>
-      <p:grpSpPr>
+      <p:grpSpPr bwMode="auto">
         <a:xfrm>
           <a:off x="0" y="0"/>
           <a:ext cx="0" cy="0"/>
@@ -2292,17 +3347,11 @@
       </p:grpSpPr>
       <p:sp>
         <p:nvSpPr>
-          <p:cNvPr id="3" name="object 3">
-            <a:extLst>
-              <a:ext uri="{FF2B5EF4-FFF2-40B4-BE49-F238E27FC236}">
-                <a16:creationId xmlns:a16="http://schemas.microsoft.com/office/drawing/2014/main" id="{98CCE4FA-836B-6AE2-481D-4F973FF4E2ED}"/>
-              </a:ext>
-            </a:extLst>
-          </p:cNvPr>
+          <p:cNvPr id="1575057376" name="object 3"/>
           <p:cNvSpPr txBox="1"/>
           <p:nvPr/>
         </p:nvSpPr>
-        <p:spPr>
+        <p:spPr bwMode="auto">
           <a:xfrm>
             <a:off x="381000" y="888075"/>
             <a:ext cx="12352767" cy="6803974"/>
@@ -2317,177 +3366,221 @@
           </a:bodyPr>
           <a:lstStyle/>
           <a:p>
-            <a:endParaRPr lang="en-GB" sz="2400" spc="-17" dirty="0">
+            <a:pPr>
+              <a:defRPr/>
+            </a:pPr>
+            <a:endParaRPr lang="en-GB" sz="2400" spc="-17">
               <a:solidFill>
                 <a:schemeClr val="tx1"/>
               </a:solidFill>
-              <a:latin typeface="Comic Sans MS" panose="030F0702030302020204" pitchFamily="66" charset="0"/>
+              <a:latin typeface="Comic Sans MS"/>
               <a:cs typeface="Comic Sans MS"/>
             </a:endParaRPr>
           </a:p>
           <a:p>
-            <a:r>
-              <a:rPr lang="en-GB" sz="2400" spc="-17" dirty="0">
+            <a:pPr>
+              <a:defRPr/>
+            </a:pPr>
+            <a:r>
+              <a:rPr lang="en-GB" sz="2400" spc="-17">
                 <a:solidFill>
                   <a:schemeClr val="tx1"/>
                 </a:solidFill>
-                <a:latin typeface="Comic Sans MS" panose="030F0702030302020204" pitchFamily="66" charset="0"/>
+                <a:latin typeface="Comic Sans MS"/>
                 <a:cs typeface="Comic Sans MS"/>
               </a:rPr>
               <a:t>5️⃣ Sequence of Learning Languages ​​and Tools</a:t>
             </a:r>
-          </a:p>
-          <a:p>
-            <a:r>
-              <a:rPr lang="en-GB" sz="2400" spc="-17" dirty="0">
+            <a:endParaRPr/>
+          </a:p>
+          <a:p>
+            <a:pPr>
+              <a:defRPr/>
+            </a:pPr>
+            <a:r>
+              <a:rPr lang="en-GB" sz="2400" spc="-17">
                 <a:solidFill>
                   <a:schemeClr val="tx1"/>
                 </a:solidFill>
-                <a:latin typeface="Comic Sans MS" panose="030F0702030302020204" pitchFamily="66" charset="0"/>
+                <a:latin typeface="Comic Sans MS"/>
                 <a:cs typeface="Comic Sans MS"/>
               </a:rPr>
               <a:t>	🟩Main Concept: Learning programming is not limited to one language, but 			rather focuses on the principles of problem-solving and logical thinking.</a:t>
             </a:r>
-          </a:p>
-          <a:p>
-            <a:r>
-              <a:rPr lang="en-GB" sz="2400" spc="-17" dirty="0">
+            <a:endParaRPr/>
+          </a:p>
+          <a:p>
+            <a:pPr>
+              <a:defRPr/>
+            </a:pPr>
+            <a:r>
+              <a:rPr lang="en-GB" sz="2400" spc="-17">
                 <a:solidFill>
                   <a:schemeClr val="tx1"/>
                 </a:solidFill>
-                <a:latin typeface="Comic Sans MS" panose="030F0702030302020204" pitchFamily="66" charset="0"/>
+                <a:latin typeface="Comic Sans MS"/>
                 <a:cs typeface="Comic Sans MS"/>
               </a:rPr>
               <a:t>	🟩 Key Point: Start with C++ because it requires learning fundamental concepts. 	🟩 Later, move on to C# to develop web and mobile applications.</a:t>
             </a:r>
-          </a:p>
-          <a:p>
-            <a:r>
-              <a:rPr lang="en-GB" sz="2400" spc="-17" dirty="0">
+            <a:endParaRPr/>
+          </a:p>
+          <a:p>
+            <a:pPr>
+              <a:defRPr/>
+            </a:pPr>
+            <a:r>
+              <a:rPr lang="en-GB" sz="2400" spc="-17">
                 <a:solidFill>
                   <a:schemeClr val="tx1"/>
                 </a:solidFill>
-                <a:latin typeface="Comic Sans MS" panose="030F0702030302020204" pitchFamily="66" charset="0"/>
+                <a:latin typeface="Comic Sans MS"/>
                 <a:cs typeface="Comic Sans MS"/>
               </a:rPr>
               <a:t>	💡 Example: Courses include small projects that gradually increase in difficulty, 		with an emphasis on applying practical experience.</a:t>
             </a:r>
-          </a:p>
-          <a:p>
-            <a:r>
-              <a:rPr lang="en-GB" sz="2400" spc="-17" dirty="0">
+            <a:endParaRPr/>
+          </a:p>
+          <a:p>
+            <a:pPr>
+              <a:defRPr/>
+            </a:pPr>
+            <a:r>
+              <a:rPr lang="en-GB" sz="2400" spc="-17">
                 <a:solidFill>
                   <a:schemeClr val="tx1"/>
                 </a:solidFill>
-                <a:latin typeface="Comic Sans MS" panose="030F0702030302020204" pitchFamily="66" charset="0"/>
+                <a:latin typeface="Comic Sans MS"/>
                 <a:cs typeface="Comic Sans MS"/>
               </a:rPr>
               <a:t>6️⃣ Practical vs. Theoretical Learning</a:t>
             </a:r>
-          </a:p>
-          <a:p>
-            <a:r>
-              <a:rPr lang="en-GB" sz="2400" spc="-17" dirty="0">
+            <a:endParaRPr/>
+          </a:p>
+          <a:p>
+            <a:pPr>
+              <a:defRPr/>
+            </a:pPr>
+            <a:r>
+              <a:rPr lang="en-GB" sz="2400" spc="-17">
                 <a:solidFill>
                   <a:schemeClr val="tx1"/>
                 </a:solidFill>
-                <a:latin typeface="Comic Sans MS" panose="030F0702030302020204" pitchFamily="66" charset="0"/>
+                <a:latin typeface="Comic Sans MS"/>
                 <a:cs typeface="Comic Sans MS"/>
               </a:rPr>
               <a:t>	🟩 Definition: Programming is an applied profession, not a theoretical one.</a:t>
             </a:r>
-          </a:p>
-          <a:p>
-            <a:r>
-              <a:rPr lang="en-GB" sz="2400" spc="-17" dirty="0">
+            <a:endParaRPr/>
+          </a:p>
+          <a:p>
+            <a:pPr>
+              <a:defRPr/>
+            </a:pPr>
+            <a:r>
+              <a:rPr lang="en-GB" sz="2400" spc="-17">
                 <a:solidFill>
                   <a:schemeClr val="tx1"/>
                 </a:solidFill>
-                <a:latin typeface="Comic Sans MS" panose="030F0702030302020204" pitchFamily="66" charset="0"/>
+                <a:latin typeface="Comic Sans MS"/>
                 <a:cs typeface="Comic Sans MS"/>
               </a:rPr>
               <a:t>	💡 Example : Remote logic exercises focus on the applied solution, not just 			observing the code.</a:t>
             </a:r>
-          </a:p>
-          <a:p>
-            <a:r>
-              <a:rPr lang="en-GB" sz="2400" spc="-17" dirty="0">
+            <a:endParaRPr/>
+          </a:p>
+          <a:p>
+            <a:pPr>
+              <a:defRPr/>
+            </a:pPr>
+            <a:r>
+              <a:rPr lang="en-GB" sz="2400" spc="-17">
                 <a:solidFill>
                   <a:schemeClr val="tx1"/>
                 </a:solidFill>
-                <a:latin typeface="Comic Sans MS" panose="030F0702030302020204" pitchFamily="66" charset="0"/>
+                <a:latin typeface="Comic Sans MS"/>
                 <a:cs typeface="Comic Sans MS"/>
               </a:rPr>
               <a:t>7️⃣ Tips for Success in Learning Programming</a:t>
             </a:r>
-          </a:p>
-          <a:p>
-            <a:r>
-              <a:rPr lang="en-GB" sz="2400" spc="-17" dirty="0">
+            <a:endParaRPr/>
+          </a:p>
+          <a:p>
+            <a:pPr>
+              <a:defRPr/>
+            </a:pPr>
+            <a:r>
+              <a:rPr lang="en-GB" sz="2400" spc="-17">
                 <a:solidFill>
                   <a:schemeClr val="tx1"/>
                 </a:solidFill>
-                <a:latin typeface="Comic Sans MS" panose="030F0702030302020204" pitchFamily="66" charset="0"/>
+                <a:latin typeface="Comic Sans MS"/>
                 <a:cs typeface="Comic Sans MS"/>
               </a:rPr>
               <a:t>	🟩 Main Concept: Gradual progress and patience are the keys to success.</a:t>
             </a:r>
-          </a:p>
-          <a:p>
-            <a:r>
-              <a:rPr lang="en-GB" sz="2400" spc="-17" dirty="0">
+            <a:endParaRPr/>
+          </a:p>
+          <a:p>
+            <a:pPr>
+              <a:defRPr/>
+            </a:pPr>
+            <a:r>
+              <a:rPr lang="en-GB" sz="2400" spc="-17">
                 <a:solidFill>
                   <a:schemeClr val="tx1"/>
                 </a:solidFill>
-                <a:latin typeface="Comic Sans MS" panose="030F0702030302020204" pitchFamily="66" charset="0"/>
+                <a:latin typeface="Comic Sans MS"/>
                 <a:cs typeface="Comic Sans MS"/>
               </a:rPr>
               <a:t>	🟩 Key Point: Don't believe advertisements promising to learn programming in 		months and earn a high salary immediately. </a:t>
             </a:r>
-          </a:p>
-          <a:p>
-            <a:r>
-              <a:rPr lang="en-GB" sz="2400" spc="-17" dirty="0">
+            <a:endParaRPr/>
+          </a:p>
+          <a:p>
+            <a:pPr>
+              <a:defRPr/>
+            </a:pPr>
+            <a:r>
+              <a:rPr lang="en-GB" sz="2400" spc="-17">
                 <a:solidFill>
                   <a:schemeClr val="tx1"/>
                 </a:solidFill>
-                <a:latin typeface="Comic Sans MS" panose="030F0702030302020204" pitchFamily="66" charset="0"/>
+                <a:latin typeface="Comic Sans MS"/>
                 <a:cs typeface="Comic Sans MS"/>
               </a:rPr>
               <a:t>	💡 Example : Completing courses in order accelerates the learning of advanced 		skills later on and makes any new language easier to learn.</a:t>
             </a:r>
+            <a:endParaRPr/>
           </a:p>
         </p:txBody>
       </p:sp>
     </p:spTree>
-    <p:extLst>
-      <p:ext uri="{BB962C8B-B14F-4D97-AF65-F5344CB8AC3E}">
-        <p14:creationId xmlns:p14="http://schemas.microsoft.com/office/powerpoint/2010/main" val="3916474450"/>
-      </p:ext>
-    </p:extLst>
   </p:cSld>
   <p:clrMapOvr>
     <a:masterClrMapping/>
   </p:clrMapOvr>
+  <mc:AlternateContent xmlns:mc="http://schemas.openxmlformats.org/markup-compatibility/2006">
+    <mc:Choice xmlns:p159="http://schemas.microsoft.com/office/powerpoint/2015/09/main" xmlns:p14="http://schemas.microsoft.com/office/powerpoint/2010/main" Requires="p159">
+      <p:transition p14:dur="500" advClick="1"/>
+    </mc:Choice>
+    <mc:Fallback>
+      <p:transition advClick="1"/>
+    </mc:Fallback>
+  </mc:AlternateContent>
 </p:sld>
 </file>
 
 <file path=ppt/slides/slide6.xml><?xml version="1.0" encoding="utf-8"?>
-<p:sld xmlns:a="http://schemas.openxmlformats.org/drawingml/2006/main" xmlns:r="http://schemas.openxmlformats.org/officeDocument/2006/relationships" xmlns:p="http://schemas.openxmlformats.org/presentationml/2006/main" showMasterSp="0">
-  <p:cSld>
+<p:sld xmlns:a="http://schemas.openxmlformats.org/drawingml/2006/main" xmlns:r="http://schemas.openxmlformats.org/officeDocument/2006/relationships" xmlns:p="http://schemas.openxmlformats.org/presentationml/2006/main" xmlns:m="http://schemas.openxmlformats.org/officeDocument/2006/math" xmlns:w="http://schemas.openxmlformats.org/wordprocessingml/2006/main" xmlns:mc="http://schemas.openxmlformats.org/markup-compatibility/2006" showMasterPhAnim="0" showMasterSp="0" show="1">
+  <p:cSld name="">
     <p:spTree>
       <p:nvGrpSpPr>
-        <p:cNvPr id="1" name="">
-          <a:extLst>
-            <a:ext uri="{FF2B5EF4-FFF2-40B4-BE49-F238E27FC236}">
-              <a16:creationId xmlns:a16="http://schemas.microsoft.com/office/drawing/2014/main" id="{89437448-96B9-E9B7-9E55-EA230351015B}"/>
-            </a:ext>
-          </a:extLst>
-        </p:cNvPr>
+        <p:cNvPr id="1" name=""/>
         <p:cNvGrpSpPr/>
         <p:nvPr/>
       </p:nvGrpSpPr>
-      <p:grpSpPr>
+      <p:grpSpPr bwMode="auto">
         <a:xfrm>
           <a:off x="0" y="0"/>
           <a:ext cx="0" cy="0"/>
@@ -2497,17 +3590,14 @@
       </p:grpSpPr>
       <p:pic>
         <p:nvPicPr>
-          <p:cNvPr id="2" name="object 2"/>
+          <p:cNvPr id="1757968597" name="object 2"/>
           <p:cNvPicPr/>
           <p:nvPr/>
         </p:nvPicPr>
-        <p:blipFill>
-          <a:blip r:embed="rId2" cstate="print"/>
-          <a:stretch>
-            <a:fillRect/>
-          </a:stretch>
+        <p:blipFill rotWithShape="1">
+          <a:blip r:embed="rId3"/>
         </p:blipFill>
-        <p:spPr>
+        <p:spPr bwMode="auto">
           <a:xfrm>
             <a:off x="5862" y="29308"/>
             <a:ext cx="13386948" cy="10029092"/>
@@ -2518,34 +3608,31 @@
         </p:spPr>
       </p:pic>
     </p:spTree>
-    <p:extLst>
-      <p:ext uri="{BB962C8B-B14F-4D97-AF65-F5344CB8AC3E}">
-        <p14:creationId xmlns:p14="http://schemas.microsoft.com/office/powerpoint/2010/main" val="2082828420"/>
-      </p:ext>
-    </p:extLst>
   </p:cSld>
   <p:clrMapOvr>
     <a:masterClrMapping/>
   </p:clrMapOvr>
+  <mc:AlternateContent xmlns:mc="http://schemas.openxmlformats.org/markup-compatibility/2006">
+    <mc:Choice xmlns:p159="http://schemas.microsoft.com/office/powerpoint/2015/09/main" xmlns:p14="http://schemas.microsoft.com/office/powerpoint/2010/main" Requires="p159">
+      <p:transition p14:dur="500" advClick="1"/>
+    </mc:Choice>
+    <mc:Fallback>
+      <p:transition advClick="1"/>
+    </mc:Fallback>
+  </mc:AlternateContent>
 </p:sld>
 </file>
 
 <file path=ppt/slides/slide7.xml><?xml version="1.0" encoding="utf-8"?>
-<p:sld xmlns:a="http://schemas.openxmlformats.org/drawingml/2006/main" xmlns:r="http://schemas.openxmlformats.org/officeDocument/2006/relationships" xmlns:p="http://schemas.openxmlformats.org/presentationml/2006/main" showMasterSp="0">
-  <p:cSld>
+<p:sld xmlns:a="http://schemas.openxmlformats.org/drawingml/2006/main" xmlns:r="http://schemas.openxmlformats.org/officeDocument/2006/relationships" xmlns:p="http://schemas.openxmlformats.org/presentationml/2006/main" xmlns:m="http://schemas.openxmlformats.org/officeDocument/2006/math" xmlns:w="http://schemas.openxmlformats.org/wordprocessingml/2006/main" xmlns:mc="http://schemas.openxmlformats.org/markup-compatibility/2006" showMasterPhAnim="0" showMasterSp="1" show="1">
+  <p:cSld name="">
     <p:spTree>
       <p:nvGrpSpPr>
-        <p:cNvPr id="1" name="">
-          <a:extLst>
-            <a:ext uri="{FF2B5EF4-FFF2-40B4-BE49-F238E27FC236}">
-              <a16:creationId xmlns:a16="http://schemas.microsoft.com/office/drawing/2014/main" id="{44A67A5D-627C-0F98-41B1-39B12A49CD9A}"/>
-            </a:ext>
-          </a:extLst>
-        </p:cNvPr>
+        <p:cNvPr id="1" name=""/>
         <p:cNvGrpSpPr/>
         <p:nvPr/>
       </p:nvGrpSpPr>
-      <p:grpSpPr>
+      <p:grpSpPr bwMode="auto">
         <a:xfrm>
           <a:off x="0" y="0"/>
           <a:ext cx="0" cy="0"/>
@@ -2553,79 +3640,13 @@
           <a:chExt cx="0" cy="0"/>
         </a:xfrm>
       </p:grpSpPr>
-      <p:pic>
-        <p:nvPicPr>
-          <p:cNvPr id="3" name="object 3"/>
-          <p:cNvPicPr/>
+      <p:sp>
+        <p:nvSpPr>
+          <p:cNvPr id="116349134" name="object 4"/>
+          <p:cNvSpPr txBox="1"/>
           <p:nvPr/>
-        </p:nvPicPr>
-        <p:blipFill>
-          <a:blip r:embed="rId2" cstate="print"/>
-          <a:stretch>
-            <a:fillRect/>
-          </a:stretch>
-        </p:blipFill>
-        <p:spPr>
-          <a:xfrm>
-            <a:off x="0" y="609600"/>
-            <a:ext cx="13437370" cy="8839200"/>
-          </a:xfrm>
-          <a:prstGeom prst="rect">
-            <a:avLst/>
-          </a:prstGeom>
-        </p:spPr>
-      </p:pic>
-    </p:spTree>
-    <p:extLst>
-      <p:ext uri="{BB962C8B-B14F-4D97-AF65-F5344CB8AC3E}">
-        <p14:creationId xmlns:p14="http://schemas.microsoft.com/office/powerpoint/2010/main" val="3646216225"/>
-      </p:ext>
-    </p:extLst>
-  </p:cSld>
-  <p:clrMapOvr>
-    <a:masterClrMapping/>
-  </p:clrMapOvr>
-</p:sld>
-</file>
-
-<file path=ppt/slides/slide8.xml><?xml version="1.0" encoding="utf-8"?>
-<p:sld xmlns:a="http://schemas.openxmlformats.org/drawingml/2006/main" xmlns:r="http://schemas.openxmlformats.org/officeDocument/2006/relationships" xmlns:p="http://schemas.openxmlformats.org/presentationml/2006/main">
-  <p:cSld>
-    <p:spTree>
-      <p:nvGrpSpPr>
-        <p:cNvPr id="1" name="">
-          <a:extLst>
-            <a:ext uri="{FF2B5EF4-FFF2-40B4-BE49-F238E27FC236}">
-              <a16:creationId xmlns:a16="http://schemas.microsoft.com/office/drawing/2014/main" id="{4000C985-45BF-D625-B127-8108457FDBB6}"/>
-            </a:ext>
-          </a:extLst>
-        </p:cNvPr>
-        <p:cNvGrpSpPr/>
-        <p:nvPr/>
-      </p:nvGrpSpPr>
-      <p:grpSpPr>
-        <a:xfrm>
-          <a:off x="0" y="0"/>
-          <a:ext cx="0" cy="0"/>
-          <a:chOff x="0" y="0"/>
-          <a:chExt cx="0" cy="0"/>
-        </a:xfrm>
-      </p:grpSpPr>
-      <p:sp>
-        <p:nvSpPr>
-          <p:cNvPr id="3" name="object 4">
-            <a:extLst>
-              <a:ext uri="{FF2B5EF4-FFF2-40B4-BE49-F238E27FC236}">
-                <a16:creationId xmlns:a16="http://schemas.microsoft.com/office/drawing/2014/main" id="{2DD6DF42-8147-ACB0-9155-6AB216D32B4F}"/>
-              </a:ext>
-            </a:extLst>
-          </p:cNvPr>
-          <p:cNvSpPr txBox="1">
-            <a:spLocks/>
-          </p:cNvSpPr>
-          <p:nvPr/>
-        </p:nvSpPr>
-        <p:spPr>
+        </p:nvSpPr>
+        <p:spPr bwMode="auto">
           <a:xfrm>
             <a:off x="0" y="4712874"/>
             <a:ext cx="13411200" cy="632652"/>
@@ -2640,7 +3661,7 @@
           </a:bodyPr>
           <a:lstStyle>
             <a:defPPr>
-              <a:defRPr kern="0"/>
+              <a:defRPr/>
             </a:defPPr>
             <a:lvl1pPr>
               <a:defRPr>
@@ -2655,9 +3676,10 @@
               <a:spcBef>
                 <a:spcPts val="133"/>
               </a:spcBef>
-            </a:pPr>
-            <a:r>
-              <a:rPr lang="sv-SE" sz="4000" b="1" spc="-17" dirty="0" err="1">
+              <a:defRPr/>
+            </a:pPr>
+            <a:r>
+              <a:rPr lang="sv-SE" sz="4000" b="1" spc="-17">
                 <a:solidFill>
                   <a:srgbClr val="FF0000"/>
                 </a:solidFill>
@@ -2666,7 +3688,7 @@
               <a:t>Thank</a:t>
             </a:r>
             <a:r>
-              <a:rPr lang="sv-SE" sz="4000" b="1" spc="-17" dirty="0">
+              <a:rPr lang="sv-SE" sz="4000" b="1" spc="-17">
                 <a:solidFill>
                   <a:srgbClr val="FF0000"/>
                 </a:solidFill>
@@ -2675,7 +3697,7 @@
               <a:t> </a:t>
             </a:r>
             <a:r>
-              <a:rPr lang="sv-SE" sz="4000" b="1" spc="-17" dirty="0" err="1">
+              <a:rPr lang="sv-SE" sz="4000" b="1" spc="-17">
                 <a:solidFill>
                   <a:srgbClr val="FF0000"/>
                 </a:solidFill>
@@ -2684,7 +3706,7 @@
               <a:t>you</a:t>
             </a:r>
             <a:r>
-              <a:rPr lang="sv-SE" sz="4000" spc="-21" dirty="0">
+              <a:rPr lang="sv-SE" sz="4000" spc="-21">
                 <a:solidFill>
                   <a:srgbClr val="FF0000"/>
                 </a:solidFill>
@@ -2692,7 +3714,7 @@
               <a:t> </a:t>
             </a:r>
             <a:r>
-              <a:rPr lang="sv-SE" sz="4000" spc="-67" dirty="0">
+              <a:rPr lang="sv-SE" sz="4000" spc="-67">
                 <a:solidFill>
                   <a:srgbClr val="FF0000"/>
                 </a:solidFill>
@@ -2701,7 +3723,7 @@
               </a:rPr>
               <a:t></a:t>
             </a:r>
-            <a:endParaRPr lang="sv-SE" sz="4000" dirty="0">
+            <a:endParaRPr lang="sv-SE" sz="4000">
               <a:solidFill>
                 <a:srgbClr val="FF0000"/>
               </a:solidFill>
@@ -2712,20 +3734,23 @@
         </p:txBody>
       </p:sp>
     </p:spTree>
-    <p:extLst>
-      <p:ext uri="{BB962C8B-B14F-4D97-AF65-F5344CB8AC3E}">
-        <p14:creationId xmlns:p14="http://schemas.microsoft.com/office/powerpoint/2010/main" val="1303110950"/>
-      </p:ext>
-    </p:extLst>
   </p:cSld>
   <p:clrMapOvr>
     <a:masterClrMapping/>
   </p:clrMapOvr>
+  <mc:AlternateContent xmlns:mc="http://schemas.openxmlformats.org/markup-compatibility/2006">
+    <mc:Choice xmlns:p159="http://schemas.microsoft.com/office/powerpoint/2015/09/main" xmlns:p14="http://schemas.microsoft.com/office/powerpoint/2010/main" Requires="p159">
+      <p:transition p14:dur="500" advClick="1"/>
+    </mc:Choice>
+    <mc:Fallback>
+      <p:transition advClick="1"/>
+    </mc:Fallback>
+  </mc:AlternateContent>
 </p:sld>
 </file>
 
 <file path=ppt/theme/theme1.xml><?xml version="1.0" encoding="utf-8"?>
-<a:theme xmlns:a="http://schemas.openxmlformats.org/drawingml/2006/main" name="Office Theme">
+<a:theme xmlns:a="http://schemas.openxmlformats.org/drawingml/2006/main" xmlns:r="http://schemas.openxmlformats.org/officeDocument/2006/relationships" xmlns:p="http://schemas.openxmlformats.org/presentationml/2006/main" name="Office Theme">
   <a:themeElements>
     <a:clrScheme name="Office">
       <a:dk1>
@@ -2768,71 +3793,13 @@
     <a:fontScheme name="Office">
       <a:majorFont>
         <a:latin typeface="Calibri"/>
-        <a:ea typeface=""/>
-        <a:cs typeface=""/>
-        <a:font script="Jpan" typeface="ＭＳ Ｐゴシック"/>
-        <a:font script="Hang" typeface="맑은 고딕"/>
-        <a:font script="Hans" typeface="宋体"/>
-        <a:font script="Hant" typeface="新細明體"/>
-        <a:font script="Arab" typeface="Times New Roman"/>
-        <a:font script="Hebr" typeface="Times New Roman"/>
-        <a:font script="Thai" typeface="Angsana New"/>
-        <a:font script="Ethi" typeface="Nyala"/>
-        <a:font script="Beng" typeface="Vrinda"/>
-        <a:font script="Gujr" typeface="Shruti"/>
-        <a:font script="Khmr" typeface="MoolBoran"/>
-        <a:font script="Knda" typeface="Tunga"/>
-        <a:font script="Guru" typeface="Raavi"/>
-        <a:font script="Cans" typeface="Euphemia"/>
-        <a:font script="Cher" typeface="Plantagenet Cherokee"/>
-        <a:font script="Yiii" typeface="Microsoft Yi Baiti"/>
-        <a:font script="Tibt" typeface="Microsoft Himalaya"/>
-        <a:font script="Thaa" typeface="MV Boli"/>
-        <a:font script="Deva" typeface="Mangal"/>
-        <a:font script="Telu" typeface="Gautami"/>
-        <a:font script="Taml" typeface="Latha"/>
-        <a:font script="Syrc" typeface="Estrangelo Edessa"/>
-        <a:font script="Orya" typeface="Kalinga"/>
-        <a:font script="Mlym" typeface="Kartika"/>
-        <a:font script="Laoo" typeface="DokChampa"/>
-        <a:font script="Sinh" typeface="Iskoola Pota"/>
-        <a:font script="Mong" typeface="Mongolian Baiti"/>
-        <a:font script="Viet" typeface="Times New Roman"/>
-        <a:font script="Uigh" typeface="Microsoft Uighur"/>
+        <a:ea typeface="Arial"/>
+        <a:cs typeface="Arial"/>
       </a:majorFont>
       <a:minorFont>
         <a:latin typeface="Calibri"/>
-        <a:ea typeface=""/>
-        <a:cs typeface=""/>
-        <a:font script="Jpan" typeface="ＭＳ Ｐゴシック"/>
-        <a:font script="Hang" typeface="맑은 고딕"/>
-        <a:font script="Hans" typeface="宋体"/>
-        <a:font script="Hant" typeface="新細明體"/>
-        <a:font script="Arab" typeface="Arial"/>
-        <a:font script="Hebr" typeface="Arial"/>
-        <a:font script="Thai" typeface="Cordia New"/>
-        <a:font script="Ethi" typeface="Nyala"/>
-        <a:font script="Beng" typeface="Vrinda"/>
-        <a:font script="Gujr" typeface="Shruti"/>
-        <a:font script="Khmr" typeface="DaunPenh"/>
-        <a:font script="Knda" typeface="Tunga"/>
-        <a:font script="Guru" typeface="Raavi"/>
-        <a:font script="Cans" typeface="Euphemia"/>
-        <a:font script="Cher" typeface="Plantagenet Cherokee"/>
-        <a:font script="Yiii" typeface="Microsoft Yi Baiti"/>
-        <a:font script="Tibt" typeface="Microsoft Himalaya"/>
-        <a:font script="Thaa" typeface="MV Boli"/>
-        <a:font script="Deva" typeface="Mangal"/>
-        <a:font script="Telu" typeface="Gautami"/>
-        <a:font script="Taml" typeface="Latha"/>
-        <a:font script="Syrc" typeface="Estrangelo Edessa"/>
-        <a:font script="Orya" typeface="Kalinga"/>
-        <a:font script="Mlym" typeface="Kartika"/>
-        <a:font script="Laoo" typeface="DokChampa"/>
-        <a:font script="Sinh" typeface="Iskoola Pota"/>
-        <a:font script="Mong" typeface="Mongolian Baiti"/>
-        <a:font script="Viet" typeface="Arial"/>
-        <a:font script="Uigh" typeface="Microsoft Uighur"/>
+        <a:ea typeface="Arial"/>
+        <a:cs typeface="Arial"/>
       </a:minorFont>
     </a:fontScheme>
     <a:fmtScheme name="Office">
@@ -2840,7 +3807,7 @@
         <a:solidFill>
           <a:schemeClr val="phClr"/>
         </a:solidFill>
-        <a:gradFill rotWithShape="1">
+        <a:gradFill>
           <a:gsLst>
             <a:gs pos="0">
               <a:schemeClr val="phClr">
@@ -2863,7 +3830,7 @@
           </a:gsLst>
           <a:lin ang="16200000" scaled="1"/>
         </a:gradFill>
-        <a:gradFill rotWithShape="1">
+        <a:gradFill>
           <a:gsLst>
             <a:gs pos="0">
               <a:schemeClr val="phClr">
@@ -2954,7 +3921,7 @@
         <a:solidFill>
           <a:schemeClr val="phClr"/>
         </a:solidFill>
-        <a:gradFill rotWithShape="1">
+        <a:gradFill>
           <a:gsLst>
             <a:gs pos="0">
               <a:schemeClr val="phClr">
@@ -2976,11 +3943,9 @@
               </a:schemeClr>
             </a:gs>
           </a:gsLst>
-          <a:path path="circle">
-            <a:fillToRect l="50000" t="-80000" r="50000" b="180000"/>
-          </a:path>
+          <a:path path="circle"/>
         </a:gradFill>
-        <a:gradFill rotWithShape="1">
+        <a:gradFill>
           <a:gsLst>
             <a:gs pos="0">
               <a:schemeClr val="phClr">
@@ -2995,14 +3960,231 @@
               </a:schemeClr>
             </a:gs>
           </a:gsLst>
-          <a:path path="circle">
-            <a:fillToRect l="50000" t="50000" r="50000" b="50000"/>
-          </a:path>
+          <a:path path="circle"/>
         </a:gradFill>
       </a:bgFillStyleLst>
     </a:fmtScheme>
   </a:themeElements>
   <a:objectDefaults/>
-  <a:extraClrSchemeLst/>
+</a:theme>
+</file>
+
+<file path=ppt/theme/theme2.xml><?xml version="1.0" encoding="utf-8"?>
+<a:theme xmlns:a="http://schemas.openxmlformats.org/drawingml/2006/main" xmlns:r="http://schemas.openxmlformats.org/officeDocument/2006/relationships" xmlns:p="http://schemas.openxmlformats.org/presentationml/2006/main" name="Office Theme">
+  <a:themeElements>
+    <a:clrScheme name="Office">
+      <a:dk1>
+        <a:sysClr val="windowText" lastClr="000000"/>
+      </a:dk1>
+      <a:lt1>
+        <a:sysClr val="window" lastClr="FFFFFF"/>
+      </a:lt1>
+      <a:dk2>
+        <a:srgbClr val="1F497D"/>
+      </a:dk2>
+      <a:lt2>
+        <a:srgbClr val="EEECE1"/>
+      </a:lt2>
+      <a:accent1>
+        <a:srgbClr val="4F81BD"/>
+      </a:accent1>
+      <a:accent2>
+        <a:srgbClr val="C0504D"/>
+      </a:accent2>
+      <a:accent3>
+        <a:srgbClr val="9BBB59"/>
+      </a:accent3>
+      <a:accent4>
+        <a:srgbClr val="8064A2"/>
+      </a:accent4>
+      <a:accent5>
+        <a:srgbClr val="4BACC6"/>
+      </a:accent5>
+      <a:accent6>
+        <a:srgbClr val="F79646"/>
+      </a:accent6>
+      <a:hlink>
+        <a:srgbClr val="0000FF"/>
+      </a:hlink>
+      <a:folHlink>
+        <a:srgbClr val="800080"/>
+      </a:folHlink>
+    </a:clrScheme>
+    <a:fontScheme name="">
+      <a:majorFont>
+        <a:latin typeface="Calibri"/>
+        <a:ea typeface="Arial"/>
+        <a:cs typeface="Arial"/>
+      </a:majorFont>
+      <a:minorFont>
+        <a:latin typeface="Calibri"/>
+        <a:ea typeface="Arial"/>
+        <a:cs typeface="Arial"/>
+      </a:minorFont>
+    </a:fontScheme>
+    <a:fmtScheme name="Office">
+      <a:fillStyleLst>
+        <a:solidFill>
+          <a:schemeClr val="phClr"/>
+        </a:solidFill>
+        <a:gradFill>
+          <a:gsLst>
+            <a:gs pos="0">
+              <a:schemeClr val="phClr">
+                <a:tint val="50000"/>
+                <a:satMod val="300000"/>
+              </a:schemeClr>
+            </a:gs>
+            <a:gs pos="35000">
+              <a:schemeClr val="phClr">
+                <a:tint val="37000"/>
+                <a:satMod val="300000"/>
+              </a:schemeClr>
+            </a:gs>
+            <a:gs pos="100000">
+              <a:schemeClr val="phClr">
+                <a:tint val="15000"/>
+                <a:satMod val="350000"/>
+              </a:schemeClr>
+            </a:gs>
+          </a:gsLst>
+          <a:lin ang="16200000" scaled="1"/>
+        </a:gradFill>
+        <a:gradFill>
+          <a:gsLst>
+            <a:gs pos="0">
+              <a:schemeClr val="phClr">
+                <a:shade val="51000"/>
+                <a:satMod val="130000"/>
+              </a:schemeClr>
+            </a:gs>
+            <a:gs pos="80000">
+              <a:schemeClr val="phClr">
+                <a:shade val="93000"/>
+                <a:satMod val="130000"/>
+              </a:schemeClr>
+            </a:gs>
+            <a:gs pos="100000">
+              <a:schemeClr val="phClr">
+                <a:shade val="94000"/>
+                <a:satMod val="135000"/>
+              </a:schemeClr>
+            </a:gs>
+          </a:gsLst>
+          <a:lin ang="16200000" scaled="0"/>
+        </a:gradFill>
+      </a:fillStyleLst>
+      <a:lnStyleLst>
+        <a:ln w="9525" cap="flat" cmpd="sng" algn="ctr">
+          <a:solidFill>
+            <a:schemeClr val="phClr">
+              <a:shade val="95000"/>
+              <a:satMod val="105000"/>
+            </a:schemeClr>
+          </a:solidFill>
+          <a:prstDash val="solid"/>
+        </a:ln>
+        <a:ln w="25400" cap="flat" cmpd="sng" algn="ctr">
+          <a:solidFill>
+            <a:schemeClr val="phClr"/>
+          </a:solidFill>
+          <a:prstDash val="solid"/>
+        </a:ln>
+        <a:ln w="38100" cap="flat" cmpd="sng" algn="ctr">
+          <a:solidFill>
+            <a:schemeClr val="phClr"/>
+          </a:solidFill>
+          <a:prstDash val="solid"/>
+        </a:ln>
+      </a:lnStyleLst>
+      <a:effectStyleLst>
+        <a:effectStyle>
+          <a:effectLst>
+            <a:outerShdw blurRad="40000" dist="20000" dir="5400000" rotWithShape="0">
+              <a:srgbClr val="000000">
+                <a:alpha val="38000"/>
+              </a:srgbClr>
+            </a:outerShdw>
+          </a:effectLst>
+        </a:effectStyle>
+        <a:effectStyle>
+          <a:effectLst>
+            <a:outerShdw blurRad="40000" dist="23000" dir="5400000" rotWithShape="0">
+              <a:srgbClr val="000000">
+                <a:alpha val="35000"/>
+              </a:srgbClr>
+            </a:outerShdw>
+          </a:effectLst>
+        </a:effectStyle>
+        <a:effectStyle>
+          <a:effectLst>
+            <a:outerShdw blurRad="40000" dist="23000" dir="5400000" rotWithShape="0">
+              <a:srgbClr val="000000">
+                <a:alpha val="35000"/>
+              </a:srgbClr>
+            </a:outerShdw>
+          </a:effectLst>
+          <a:scene3d>
+            <a:camera prst="orthographicFront">
+              <a:rot lat="0" lon="0" rev="0"/>
+            </a:camera>
+            <a:lightRig rig="threePt" dir="t">
+              <a:rot lat="0" lon="0" rev="1200000"/>
+            </a:lightRig>
+          </a:scene3d>
+          <a:sp3d>
+            <a:bevelT w="63500" h="25400"/>
+          </a:sp3d>
+        </a:effectStyle>
+      </a:effectStyleLst>
+      <a:bgFillStyleLst>
+        <a:solidFill>
+          <a:schemeClr val="phClr"/>
+        </a:solidFill>
+        <a:gradFill>
+          <a:gsLst>
+            <a:gs pos="0">
+              <a:schemeClr val="phClr">
+                <a:tint val="40000"/>
+                <a:satMod val="350000"/>
+              </a:schemeClr>
+            </a:gs>
+            <a:gs pos="40000">
+              <a:schemeClr val="phClr">
+                <a:tint val="45000"/>
+                <a:shade val="99000"/>
+                <a:satMod val="350000"/>
+              </a:schemeClr>
+            </a:gs>
+            <a:gs pos="100000">
+              <a:schemeClr val="phClr">
+                <a:shade val="20000"/>
+                <a:satMod val="255000"/>
+              </a:schemeClr>
+            </a:gs>
+          </a:gsLst>
+          <a:path path="circle"/>
+        </a:gradFill>
+        <a:gradFill>
+          <a:gsLst>
+            <a:gs pos="0">
+              <a:schemeClr val="phClr">
+                <a:tint val="80000"/>
+                <a:satMod val="300000"/>
+              </a:schemeClr>
+            </a:gs>
+            <a:gs pos="100000">
+              <a:schemeClr val="phClr">
+                <a:shade val="30000"/>
+                <a:satMod val="200000"/>
+              </a:schemeClr>
+            </a:gs>
+          </a:gsLst>
+          <a:path path="circle"/>
+        </a:gradFill>
+      </a:bgFillStyleLst>
+    </a:fmtScheme>
+  </a:themeElements>
+  <a:objectDefaults/>
 </a:theme>
 </file>